--- a/Presentation/Pf_JemimaEgwurube_ITAI2373.pptx
+++ b/Presentation/Pf_JemimaEgwurube_ITAI2373.pptx
@@ -5,17 +5,20 @@
     <p:sldMasterId id="2147483672" r:id="rId4"/>
   </p:sldMasterIdLst>
   <p:notesMasterIdLst>
-    <p:notesMasterId r:id="rId10"/>
+    <p:notesMasterId r:id="rId13"/>
   </p:notesMasterIdLst>
   <p:handoutMasterIdLst>
-    <p:handoutMasterId r:id="rId11"/>
+    <p:handoutMasterId r:id="rId14"/>
   </p:handoutMasterIdLst>
   <p:sldIdLst>
     <p:sldId id="256" r:id="rId5"/>
     <p:sldId id="261" r:id="rId6"/>
-    <p:sldId id="258" r:id="rId7"/>
-    <p:sldId id="259" r:id="rId8"/>
-    <p:sldId id="260" r:id="rId9"/>
+    <p:sldId id="262" r:id="rId7"/>
+    <p:sldId id="258" r:id="rId8"/>
+    <p:sldId id="264" r:id="rId9"/>
+    <p:sldId id="265" r:id="rId10"/>
+    <p:sldId id="259" r:id="rId11"/>
+    <p:sldId id="260" r:id="rId12"/>
   </p:sldIdLst>
   <p:sldSz cx="12192000" cy="6858000"/>
   <p:notesSz cx="6858000" cy="9144000"/>
@@ -219,7 +222,7 @@
           <a:p>
             <a:fld id="{AF869721-F543-4A6C-BF9D-65D7CC540427}" type="datetimeFigureOut">
               <a:rPr lang="en-US" smtClean="0"/>
-              <a:t>5/3/2026</a:t>
+              <a:t>5/5/2026</a:t>
             </a:fld>
             <a:endParaRPr lang="en-US" dirty="0"/>
           </a:p>
@@ -396,7 +399,7 @@
           <a:p>
             <a:fld id="{C732326A-4C88-4AFB-AA5B-5919D81DFF5B}" type="datetimeFigureOut">
               <a:rPr lang="en-US" smtClean="0"/>
-              <a:t>5/3/2026</a:t>
+              <a:t>5/5/2026</a:t>
             </a:fld>
             <a:endParaRPr lang="en-US" dirty="0"/>
           </a:p>
@@ -896,7 +899,7 @@
           <a:p>
             <a:fld id="{C6B3AB32-59DF-41F1-9618-EDFBF5049629}" type="slidenum">
               <a:rPr lang="en-US" smtClean="0"/>
-              <a:t>4</a:t>
+              <a:t>7</a:t>
             </a:fld>
             <a:endParaRPr lang="en-US" dirty="0"/>
           </a:p>
@@ -980,7 +983,7 @@
           <a:p>
             <a:fld id="{C6B3AB32-59DF-41F1-9618-EDFBF5049629}" type="slidenum">
               <a:rPr lang="en-US" smtClean="0"/>
-              <a:t>5</a:t>
+              <a:t>8</a:t>
             </a:fld>
             <a:endParaRPr lang="en-US" dirty="0"/>
           </a:p>
@@ -1252,7 +1255,7 @@
             <a:fld id="{B61BEF0D-F0BB-DE4B-95CE-6DB70DBA9567}" type="datetimeFigureOut">
               <a:rPr lang="en-US" smtClean="0"/>
               <a:pPr/>
-              <a:t>5/3/2026</a:t>
+              <a:t>5/5/2026</a:t>
             </a:fld>
             <a:endParaRPr lang="en-US" dirty="0"/>
           </a:p>
@@ -1516,7 +1519,7 @@
             <a:fld id="{B61BEF0D-F0BB-DE4B-95CE-6DB70DBA9567}" type="datetimeFigureOut">
               <a:rPr lang="en-US" smtClean="0"/>
               <a:pPr/>
-              <a:t>5/3/2026</a:t>
+              <a:t>5/5/2026</a:t>
             </a:fld>
             <a:endParaRPr lang="en-US" dirty="0"/>
           </a:p>
@@ -1753,7 +1756,7 @@
             <a:fld id="{B61BEF0D-F0BB-DE4B-95CE-6DB70DBA9567}" type="datetimeFigureOut">
               <a:rPr lang="en-US" smtClean="0"/>
               <a:pPr/>
-              <a:t>5/3/2026</a:t>
+              <a:t>5/5/2026</a:t>
             </a:fld>
             <a:endParaRPr lang="en-US" dirty="0"/>
           </a:p>
@@ -2002,7 +2005,7 @@
             <a:fld id="{B61BEF0D-F0BB-DE4B-95CE-6DB70DBA9567}" type="datetimeFigureOut">
               <a:rPr lang="en-US" smtClean="0"/>
               <a:pPr/>
-              <a:t>5/3/2026</a:t>
+              <a:t>5/5/2026</a:t>
             </a:fld>
             <a:endParaRPr lang="en-US" dirty="0"/>
           </a:p>
@@ -2311,7 +2314,7 @@
             <a:fld id="{B61BEF0D-F0BB-DE4B-95CE-6DB70DBA9567}" type="datetimeFigureOut">
               <a:rPr lang="en-US" smtClean="0"/>
               <a:pPr/>
-              <a:t>5/3/2026</a:t>
+              <a:t>5/5/2026</a:t>
             </a:fld>
             <a:endParaRPr lang="en-US" dirty="0"/>
           </a:p>
@@ -2622,7 +2625,7 @@
             <a:fld id="{B61BEF0D-F0BB-DE4B-95CE-6DB70DBA9567}" type="datetimeFigureOut">
               <a:rPr lang="en-US" smtClean="0"/>
               <a:pPr/>
-              <a:t>5/3/2026</a:t>
+              <a:t>5/5/2026</a:t>
             </a:fld>
             <a:endParaRPr lang="en-US" dirty="0"/>
           </a:p>
@@ -3046,7 +3049,7 @@
             <a:fld id="{B61BEF0D-F0BB-DE4B-95CE-6DB70DBA9567}" type="datetimeFigureOut">
               <a:rPr lang="en-US" smtClean="0"/>
               <a:pPr/>
-              <a:t>5/3/2026</a:t>
+              <a:t>5/5/2026</a:t>
             </a:fld>
             <a:endParaRPr lang="en-US" dirty="0"/>
           </a:p>
@@ -3143,7 +3146,7 @@
             <a:fld id="{B61BEF0D-F0BB-DE4B-95CE-6DB70DBA9567}" type="datetimeFigureOut">
               <a:rPr lang="en-US" smtClean="0"/>
               <a:pPr/>
-              <a:t>5/3/2026</a:t>
+              <a:t>5/5/2026</a:t>
             </a:fld>
             <a:endParaRPr lang="en-US" dirty="0"/>
           </a:p>
@@ -3307,7 +3310,7 @@
             <a:fld id="{B61BEF0D-F0BB-DE4B-95CE-6DB70DBA9567}" type="datetimeFigureOut">
               <a:rPr lang="en-US" smtClean="0"/>
               <a:pPr/>
-              <a:t>5/3/2026</a:t>
+              <a:t>5/5/2026</a:t>
             </a:fld>
             <a:endParaRPr lang="en-US" dirty="0"/>
           </a:p>
@@ -3687,7 +3690,7 @@
             <a:fld id="{B61BEF0D-F0BB-DE4B-95CE-6DB70DBA9567}" type="datetimeFigureOut">
               <a:rPr lang="en-US" smtClean="0"/>
               <a:pPr/>
-              <a:t>5/3/2026</a:t>
+              <a:t>5/5/2026</a:t>
             </a:fld>
             <a:endParaRPr lang="en-US" dirty="0"/>
           </a:p>
@@ -3978,7 +3981,7 @@
             <a:fld id="{B61BEF0D-F0BB-DE4B-95CE-6DB70DBA9567}" type="datetimeFigureOut">
               <a:rPr lang="en-US" smtClean="0"/>
               <a:pPr/>
-              <a:t>5/3/2026</a:t>
+              <a:t>5/5/2026</a:t>
             </a:fld>
             <a:endParaRPr lang="en-US" dirty="0"/>
           </a:p>
@@ -4191,7 +4194,7 @@
             <a:fld id="{B61BEF0D-F0BB-DE4B-95CE-6DB70DBA9567}" type="datetimeFigureOut">
               <a:rPr lang="en-US" smtClean="0"/>
               <a:pPr/>
-              <a:t>5/3/2026</a:t>
+              <a:t>5/5/2026</a:t>
             </a:fld>
             <a:endParaRPr lang="en-US" dirty="0"/>
           </a:p>
@@ -6707,6 +6710,277 @@
   <p:cSld>
     <p:spTree>
       <p:nvGrpSpPr>
+        <p:cNvPr id="1" name="">
+          <a:extLst>
+            <a:ext uri="{FF2B5EF4-FFF2-40B4-BE49-F238E27FC236}">
+              <a16:creationId xmlns:a16="http://schemas.microsoft.com/office/drawing/2014/main" id="{0A07CB4D-6CF0-4DE1-500E-96D1CE313666}"/>
+            </a:ext>
+          </a:extLst>
+        </p:cNvPr>
+        <p:cNvGrpSpPr/>
+        <p:nvPr/>
+      </p:nvGrpSpPr>
+      <p:grpSpPr>
+        <a:xfrm>
+          <a:off x="0" y="0"/>
+          <a:ext cx="0" cy="0"/>
+          <a:chOff x="0" y="0"/>
+          <a:chExt cx="0" cy="0"/>
+        </a:xfrm>
+      </p:grpSpPr>
+      <p:sp>
+        <p:nvSpPr>
+          <p:cNvPr id="10" name="DarkBg">
+            <a:extLst>
+              <a:ext uri="{FF2B5EF4-FFF2-40B4-BE49-F238E27FC236}">
+                <a16:creationId xmlns:a16="http://schemas.microsoft.com/office/drawing/2014/main" id="{135FE730-161F-A70C-B515-BE1B74A5955E}"/>
+              </a:ext>
+            </a:extLst>
+          </p:cNvPr>
+          <p:cNvSpPr>
+            <a:spLocks noTextEdit="1"/>
+          </p:cNvSpPr>
+          <p:nvPr/>
+        </p:nvSpPr>
+        <p:spPr>
+          <a:xfrm>
+            <a:off x="-2510" y="31000"/>
+            <a:ext cx="12192000" cy="6858000"/>
+          </a:xfrm>
+          <a:prstGeom prst="rect">
+            <a:avLst/>
+          </a:prstGeom>
+          <a:solidFill>
+            <a:srgbClr val="050F2E"/>
+          </a:solidFill>
+          <a:ln>
+            <a:noFill/>
+          </a:ln>
+        </p:spPr>
+        <p:txBody>
+          <a:bodyPr/>
+          <a:lstStyle/>
+          <a:p>
+            <a:endParaRPr lang="en-US"/>
+          </a:p>
+        </p:txBody>
+      </p:sp>
+      <p:sp>
+        <p:nvSpPr>
+          <p:cNvPr id="11" name="B1">
+            <a:extLst>
+              <a:ext uri="{FF2B5EF4-FFF2-40B4-BE49-F238E27FC236}">
+                <a16:creationId xmlns:a16="http://schemas.microsoft.com/office/drawing/2014/main" id="{C5885934-2DB9-7BF4-15D8-446C3620F601}"/>
+              </a:ext>
+            </a:extLst>
+          </p:cNvPr>
+          <p:cNvSpPr>
+            <a:spLocks noTextEdit="1"/>
+          </p:cNvSpPr>
+          <p:nvPr/>
+        </p:nvSpPr>
+        <p:spPr>
+          <a:xfrm>
+            <a:off x="446534" y="457200"/>
+            <a:ext cx="3703320" cy="80000"/>
+          </a:xfrm>
+          <a:prstGeom prst="rect">
+            <a:avLst/>
+          </a:prstGeom>
+          <a:solidFill>
+            <a:srgbClr val="1A3A7C"/>
+          </a:solidFill>
+          <a:ln>
+            <a:noFill/>
+          </a:ln>
+        </p:spPr>
+        <p:txBody>
+          <a:bodyPr/>
+          <a:lstStyle/>
+          <a:p>
+            <a:endParaRPr lang="en-US"/>
+          </a:p>
+        </p:txBody>
+      </p:sp>
+      <p:sp>
+        <p:nvSpPr>
+          <p:cNvPr id="12" name="B2">
+            <a:extLst>
+              <a:ext uri="{FF2B5EF4-FFF2-40B4-BE49-F238E27FC236}">
+                <a16:creationId xmlns:a16="http://schemas.microsoft.com/office/drawing/2014/main" id="{2899DF1D-07C7-57D7-9CC7-42183B182CD6}"/>
+              </a:ext>
+            </a:extLst>
+          </p:cNvPr>
+          <p:cNvSpPr>
+            <a:spLocks noTextEdit="1"/>
+          </p:cNvSpPr>
+          <p:nvPr/>
+        </p:nvSpPr>
+        <p:spPr>
+          <a:xfrm>
+            <a:off x="4241830" y="457200"/>
+            <a:ext cx="3703320" cy="80000"/>
+          </a:xfrm>
+          <a:prstGeom prst="rect">
+            <a:avLst/>
+          </a:prstGeom>
+          <a:solidFill>
+            <a:srgbClr val="7CEBFF"/>
+          </a:solidFill>
+          <a:ln>
+            <a:noFill/>
+          </a:ln>
+        </p:spPr>
+        <p:txBody>
+          <a:bodyPr/>
+          <a:lstStyle/>
+          <a:p>
+            <a:endParaRPr lang="en-US"/>
+          </a:p>
+        </p:txBody>
+      </p:sp>
+      <p:sp>
+        <p:nvSpPr>
+          <p:cNvPr id="14" name="SlideTitle">
+            <a:extLst>
+              <a:ext uri="{FF2B5EF4-FFF2-40B4-BE49-F238E27FC236}">
+                <a16:creationId xmlns:a16="http://schemas.microsoft.com/office/drawing/2014/main" id="{A4193B0D-2BF5-A94A-1776-6CCFEDF19034}"/>
+              </a:ext>
+            </a:extLst>
+          </p:cNvPr>
+          <p:cNvSpPr txBox="1"/>
+          <p:nvPr/>
+        </p:nvSpPr>
+        <p:spPr>
+          <a:xfrm>
+            <a:off x="398000" y="3200000"/>
+            <a:ext cx="11032000" cy="520000"/>
+          </a:xfrm>
+          <a:prstGeom prst="rect">
+            <a:avLst/>
+          </a:prstGeom>
+          <a:noFill/>
+          <a:ln>
+            <a:noFill/>
+          </a:ln>
+        </p:spPr>
+        <p:txBody>
+          <a:bodyPr lIns="91440" tIns="91440" rIns="91440" bIns="91440" anchor="ctr">
+            <a:normAutofit fontScale="92500" lnSpcReduction="20000"/>
+          </a:bodyPr>
+          <a:lstStyle/>
+          <a:p>
+            <a:pPr algn="ctr">
+              <a:buNone/>
+            </a:pPr>
+            <a:r>
+              <a:rPr lang="en-US" sz="2800" b="1" dirty="0">
+                <a:solidFill>
+                  <a:srgbClr val="FFFFFF"/>
+                </a:solidFill>
+              </a:rPr>
+              <a:t>FEATURED PROJECTS</a:t>
+            </a:r>
+          </a:p>
+        </p:txBody>
+      </p:sp>
+      <p:sp>
+        <p:nvSpPr>
+          <p:cNvPr id="15" name="TitleLine">
+            <a:extLst>
+              <a:ext uri="{FF2B5EF4-FFF2-40B4-BE49-F238E27FC236}">
+                <a16:creationId xmlns:a16="http://schemas.microsoft.com/office/drawing/2014/main" id="{2B747F08-EFBD-9BB6-7BFC-7113D4B14E44}"/>
+              </a:ext>
+            </a:extLst>
+          </p:cNvPr>
+          <p:cNvSpPr>
+            <a:spLocks noTextEdit="1"/>
+          </p:cNvSpPr>
+          <p:nvPr/>
+        </p:nvSpPr>
+        <p:spPr>
+          <a:xfrm>
+            <a:off x="4241830" y="3940929"/>
+            <a:ext cx="3200000" cy="60000"/>
+          </a:xfrm>
+          <a:prstGeom prst="rect">
+            <a:avLst/>
+          </a:prstGeom>
+          <a:solidFill>
+            <a:srgbClr val="7CEBFF"/>
+          </a:solidFill>
+          <a:ln>
+            <a:noFill/>
+          </a:ln>
+        </p:spPr>
+        <p:txBody>
+          <a:bodyPr/>
+          <a:lstStyle/>
+          <a:p>
+            <a:endParaRPr lang="en-US"/>
+          </a:p>
+        </p:txBody>
+      </p:sp>
+      <p:sp>
+        <p:nvSpPr>
+          <p:cNvPr id="48" name="PDesc2">
+            <a:extLst>
+              <a:ext uri="{FF2B5EF4-FFF2-40B4-BE49-F238E27FC236}">
+                <a16:creationId xmlns:a16="http://schemas.microsoft.com/office/drawing/2014/main" id="{A6D7FEBC-D389-1132-CFF9-8BC8075977B4}"/>
+              </a:ext>
+            </a:extLst>
+          </p:cNvPr>
+          <p:cNvSpPr txBox="1"/>
+          <p:nvPr/>
+        </p:nvSpPr>
+        <p:spPr>
+          <a:xfrm>
+            <a:off x="8070000" y="2260000"/>
+            <a:ext cx="3360000" cy="1200000"/>
+          </a:xfrm>
+          <a:prstGeom prst="rect">
+            <a:avLst/>
+          </a:prstGeom>
+          <a:noFill/>
+          <a:ln>
+            <a:noFill/>
+          </a:ln>
+        </p:spPr>
+        <p:txBody>
+          <a:bodyPr lIns="91440" tIns="91440" rIns="91440" bIns="91440" anchor="t">
+            <a:normAutofit/>
+          </a:bodyPr>
+          <a:lstStyle/>
+          <a:p>
+            <a:pPr algn="l">
+              <a:buNone/>
+            </a:pPr>
+            <a:endParaRPr lang="en-US" sz="1300" dirty="0">
+              <a:solidFill>
+                <a:srgbClr val="CCDDFF"/>
+              </a:solidFill>
+            </a:endParaRPr>
+          </a:p>
+        </p:txBody>
+      </p:sp>
+    </p:spTree>
+    <p:extLst>
+      <p:ext uri="{BB962C8B-B14F-4D97-AF65-F5344CB8AC3E}">
+        <p14:creationId xmlns:p14="http://schemas.microsoft.com/office/powerpoint/2010/main" val="3718079114"/>
+      </p:ext>
+    </p:extLst>
+  </p:cSld>
+  <p:clrMapOvr>
+    <a:masterClrMapping/>
+  </p:clrMapOvr>
+</p:sld>
+</file>
+
+<file path=ppt/slides/slide4.xml><?xml version="1.0" encoding="utf-8"?>
+<p:sld xmlns:a="http://schemas.openxmlformats.org/drawingml/2006/main" xmlns:r="http://schemas.openxmlformats.org/officeDocument/2006/relationships" xmlns:p="http://schemas.openxmlformats.org/presentationml/2006/main">
+  <p:cSld>
+    <p:spTree>
+      <p:nvGrpSpPr>
         <p:cNvPr id="1" name=""/>
         <p:cNvGrpSpPr/>
         <p:nvPr/>
@@ -6721,884 +6995,343 @@
       </p:grpSpPr>
       <p:sp>
         <p:nvSpPr>
-          <p:cNvPr id="10" name="DarkBg"/>
-          <p:cNvSpPr>
-            <a:spLocks noTextEdit="1"/>
-          </p:cNvSpPr>
-          <p:nvPr/>
-        </p:nvSpPr>
-        <p:spPr>
-          <a:xfrm>
-            <a:off x="0" y="0"/>
-            <a:ext cx="12192000" cy="6858000"/>
-          </a:xfrm>
-          <a:prstGeom prst="rect">
-            <a:avLst/>
-          </a:prstGeom>
-          <a:solidFill>
-            <a:srgbClr val="050F2E"/>
-          </a:solidFill>
-          <a:ln>
-            <a:noFill/>
-          </a:ln>
+          <p:cNvPr id="6" name="Title 1">
+            <a:extLst>
+              <a:ext uri="{FF2B5EF4-FFF2-40B4-BE49-F238E27FC236}">
+                <a16:creationId xmlns:a16="http://schemas.microsoft.com/office/drawing/2014/main" id="{9FF213B7-FAC2-0673-B838-43678E6FF32A}"/>
+              </a:ext>
+            </a:extLst>
+          </p:cNvPr>
+          <p:cNvSpPr>
+            <a:spLocks noGrp="1"/>
+          </p:cNvSpPr>
+          <p:nvPr>
+            <p:ph type="title"/>
+          </p:nvPr>
+        </p:nvSpPr>
+        <p:spPr>
+          <a:xfrm>
+            <a:off x="581192" y="702156"/>
+            <a:ext cx="11029616" cy="1013800"/>
+          </a:xfrm>
         </p:spPr>
         <p:txBody>
           <a:bodyPr/>
           <a:lstStyle/>
           <a:p>
-            <a:endParaRPr lang="en-US"/>
-          </a:p>
-        </p:txBody>
-      </p:sp>
-      <p:sp>
-        <p:nvSpPr>
-          <p:cNvPr id="11" name="B1"/>
-          <p:cNvSpPr>
-            <a:spLocks noTextEdit="1"/>
-          </p:cNvSpPr>
-          <p:nvPr/>
-        </p:nvSpPr>
-        <p:spPr>
-          <a:xfrm>
-            <a:off x="446534" y="457200"/>
-            <a:ext cx="3703320" cy="80000"/>
-          </a:xfrm>
-          <a:prstGeom prst="rect">
-            <a:avLst/>
-          </a:prstGeom>
-          <a:solidFill>
-            <a:srgbClr val="1A3A7C"/>
-          </a:solidFill>
-          <a:ln>
-            <a:noFill/>
-          </a:ln>
-        </p:spPr>
-        <p:txBody>
-          <a:bodyPr/>
-          <a:lstStyle/>
-          <a:p>
-            <a:endParaRPr lang="en-US"/>
-          </a:p>
-        </p:txBody>
-      </p:sp>
-      <p:sp>
-        <p:nvSpPr>
-          <p:cNvPr id="12" name="B2"/>
-          <p:cNvSpPr>
-            <a:spLocks noTextEdit="1"/>
-          </p:cNvSpPr>
-          <p:nvPr/>
-        </p:nvSpPr>
-        <p:spPr>
-          <a:xfrm>
-            <a:off x="4241830" y="457200"/>
-            <a:ext cx="3703320" cy="80000"/>
-          </a:xfrm>
-          <a:prstGeom prst="rect">
-            <a:avLst/>
-          </a:prstGeom>
-          <a:solidFill>
-            <a:srgbClr val="7CEBFF"/>
-          </a:solidFill>
-          <a:ln>
-            <a:noFill/>
-          </a:ln>
-        </p:spPr>
-        <p:txBody>
-          <a:bodyPr/>
-          <a:lstStyle/>
-          <a:p>
-            <a:endParaRPr lang="en-US"/>
-          </a:p>
-        </p:txBody>
-      </p:sp>
-      <p:sp>
-        <p:nvSpPr>
-          <p:cNvPr id="14" name="SlideTitle"/>
+            <a:r>
+              <a:rPr lang="en-US" dirty="0"/>
+              <a:t>Deep Learning: </a:t>
+            </a:r>
+            <a:r>
+              <a:rPr lang="en-US" b="1" dirty="0"/>
+              <a:t>Administrative AI Agent</a:t>
+            </a:r>
+            <a:br>
+              <a:rPr lang="en-US" b="1" dirty="0"/>
+            </a:br>
+            <a:endParaRPr lang="en-US" dirty="0"/>
+          </a:p>
+        </p:txBody>
+      </p:sp>
+      <p:graphicFrame>
+        <p:nvGraphicFramePr>
+          <p:cNvPr id="2" name="Content Placeholder 1">
+            <a:extLst>
+              <a:ext uri="{FF2B5EF4-FFF2-40B4-BE49-F238E27FC236}">
+                <a16:creationId xmlns:a16="http://schemas.microsoft.com/office/drawing/2014/main" id="{66871E74-D1F5-4C62-76F7-76E42F88BC4F}"/>
+              </a:ext>
+            </a:extLst>
+          </p:cNvPr>
+          <p:cNvGraphicFramePr>
+            <a:graphicFrameLocks noGrp="1"/>
+          </p:cNvGraphicFramePr>
+          <p:nvPr>
+            <p:ph idx="1"/>
+            <p:extLst>
+              <p:ext uri="{D42A27DB-BD31-4B8C-83A1-F6EECF244321}">
+                <p14:modId xmlns:p14="http://schemas.microsoft.com/office/powerpoint/2010/main" val="753235345"/>
+              </p:ext>
+            </p:extLst>
+          </p:nvPr>
+        </p:nvGraphicFramePr>
+        <p:xfrm>
+          <a:off x="581025" y="2181225"/>
+          <a:ext cx="11029950" cy="2108200"/>
+        </p:xfrm>
+        <a:graphic>
+          <a:graphicData uri="http://schemas.openxmlformats.org/drawingml/2006/table">
+            <a:tbl>
+              <a:tblPr firstRow="1" bandRow="1">
+                <a:tableStyleId>{5C22544A-7EE6-4342-B048-85BDC9FD1C3A}</a:tableStyleId>
+              </a:tblPr>
+              <a:tblGrid>
+                <a:gridCol w="5514975">
+                  <a:extLst>
+                    <a:ext uri="{9D8B030D-6E8A-4147-A177-3AD203B41FA5}">
+                      <a16:colId xmlns:a16="http://schemas.microsoft.com/office/drawing/2014/main" val="2181090975"/>
+                    </a:ext>
+                  </a:extLst>
+                </a:gridCol>
+                <a:gridCol w="5514975">
+                  <a:extLst>
+                    <a:ext uri="{9D8B030D-6E8A-4147-A177-3AD203B41FA5}">
+                      <a16:colId xmlns:a16="http://schemas.microsoft.com/office/drawing/2014/main" val="3454468522"/>
+                    </a:ext>
+                  </a:extLst>
+                </a:gridCol>
+              </a:tblGrid>
+              <a:tr h="370840">
+                <a:tc>
+                  <a:txBody>
+                    <a:bodyPr/>
+                    <a:lstStyle/>
+                    <a:p>
+                      <a:pPr>
+                        <a:buNone/>
+                      </a:pPr>
+                      <a:r>
+                        <a:rPr lang="en-US" b="1" dirty="0">
+                          <a:effectLst/>
+                        </a:rPr>
+                        <a:t>Detail</a:t>
+                      </a:r>
+                    </a:p>
+                  </a:txBody>
+                  <a:tcPr marL="82550" marR="82550" marT="38100" marB="38100" anchor="ctr"/>
+                </a:tc>
+                <a:tc>
+                  <a:txBody>
+                    <a:bodyPr/>
+                    <a:lstStyle/>
+                    <a:p>
+                      <a:pPr>
+                        <a:buNone/>
+                      </a:pPr>
+                      <a:r>
+                        <a:rPr lang="en-US" b="1" dirty="0">
+                          <a:effectLst/>
+                        </a:rPr>
+                        <a:t>Value</a:t>
+                      </a:r>
+                    </a:p>
+                  </a:txBody>
+                  <a:tcPr marL="82550" marR="82550" marT="38100" marB="38100" anchor="ctr"/>
+                </a:tc>
+                <a:extLst>
+                  <a:ext uri="{0D108BD9-81ED-4DB2-BD59-A6C34878D82A}">
+                    <a16:rowId xmlns:a16="http://schemas.microsoft.com/office/drawing/2014/main" val="1959077712"/>
+                  </a:ext>
+                </a:extLst>
+              </a:tr>
+              <a:tr h="370840">
+                <a:tc>
+                  <a:txBody>
+                    <a:bodyPr/>
+                    <a:lstStyle/>
+                    <a:p>
+                      <a:pPr>
+                        <a:buNone/>
+                      </a:pPr>
+                      <a:r>
+                        <a:rPr lang="en-US" dirty="0">
+                          <a:effectLst/>
+                        </a:rPr>
+                        <a:t>Architecture</a:t>
+                      </a:r>
+                    </a:p>
+                  </a:txBody>
+                  <a:tcPr marL="82550" marR="82550" marT="38100" marB="38100" anchor="ctr"/>
+                </a:tc>
+                <a:tc>
+                  <a:txBody>
+                    <a:bodyPr/>
+                    <a:lstStyle/>
+                    <a:p>
+                      <a:pPr>
+                        <a:buNone/>
+                      </a:pPr>
+                      <a:r>
+                        <a:rPr lang="en-US">
+                          <a:effectLst/>
+                        </a:rPr>
+                        <a:t>Planning-then-Execution agent pattern</a:t>
+                      </a:r>
+                    </a:p>
+                  </a:txBody>
+                  <a:tcPr marL="82550" marR="82550" marT="38100" marB="38100" anchor="ctr"/>
+                </a:tc>
+                <a:extLst>
+                  <a:ext uri="{0D108BD9-81ED-4DB2-BD59-A6C34878D82A}">
+                    <a16:rowId xmlns:a16="http://schemas.microsoft.com/office/drawing/2014/main" val="3079342903"/>
+                  </a:ext>
+                </a:extLst>
+              </a:tr>
+              <a:tr h="370840">
+                <a:tc>
+                  <a:txBody>
+                    <a:bodyPr/>
+                    <a:lstStyle/>
+                    <a:p>
+                      <a:pPr>
+                        <a:buNone/>
+                      </a:pPr>
+                      <a:r>
+                        <a:rPr lang="en-US">
+                          <a:effectLst/>
+                        </a:rPr>
+                        <a:t>Tools</a:t>
+                      </a:r>
+                    </a:p>
+                  </a:txBody>
+                  <a:tcPr marL="82550" marR="82550" marT="38100" marB="38100" anchor="ctr"/>
+                </a:tc>
+                <a:tc>
+                  <a:txBody>
+                    <a:bodyPr/>
+                    <a:lstStyle/>
+                    <a:p>
+                      <a:pPr>
+                        <a:buNone/>
+                      </a:pPr>
+                      <a:r>
+                        <a:rPr lang="en-US">
+                          <a:effectLst/>
+                        </a:rPr>
+                        <a:t>Calculator, document summarizer</a:t>
+                      </a:r>
+                    </a:p>
+                  </a:txBody>
+                  <a:tcPr marL="82550" marR="82550" marT="38100" marB="38100" anchor="ctr"/>
+                </a:tc>
+                <a:extLst>
+                  <a:ext uri="{0D108BD9-81ED-4DB2-BD59-A6C34878D82A}">
+                    <a16:rowId xmlns:a16="http://schemas.microsoft.com/office/drawing/2014/main" val="4164144350"/>
+                  </a:ext>
+                </a:extLst>
+              </a:tr>
+              <a:tr h="370840">
+                <a:tc>
+                  <a:txBody>
+                    <a:bodyPr/>
+                    <a:lstStyle/>
+                    <a:p>
+                      <a:pPr>
+                        <a:buNone/>
+                      </a:pPr>
+                      <a:r>
+                        <a:rPr lang="en-US">
+                          <a:effectLst/>
+                        </a:rPr>
+                        <a:t>Key techniques</a:t>
+                      </a:r>
+                    </a:p>
+                  </a:txBody>
+                  <a:tcPr marL="82550" marR="82550" marT="38100" marB="38100" anchor="ctr"/>
+                </a:tc>
+                <a:tc>
+                  <a:txBody>
+                    <a:bodyPr/>
+                    <a:lstStyle/>
+                    <a:p>
+                      <a:pPr>
+                        <a:buNone/>
+                      </a:pPr>
+                      <a:r>
+                        <a:rPr lang="en-US">
+                          <a:effectLst/>
+                        </a:rPr>
+                        <a:t>Agent memory, tool integration, RL-style feedback &amp; policy improvement</a:t>
+                      </a:r>
+                    </a:p>
+                  </a:txBody>
+                  <a:tcPr marL="82550" marR="82550" marT="38100" marB="38100" anchor="ctr"/>
+                </a:tc>
+                <a:extLst>
+                  <a:ext uri="{0D108BD9-81ED-4DB2-BD59-A6C34878D82A}">
+                    <a16:rowId xmlns:a16="http://schemas.microsoft.com/office/drawing/2014/main" val="2515347722"/>
+                  </a:ext>
+                </a:extLst>
+              </a:tr>
+              <a:tr h="370840">
+                <a:tc>
+                  <a:txBody>
+                    <a:bodyPr/>
+                    <a:lstStyle/>
+                    <a:p>
+                      <a:pPr>
+                        <a:buNone/>
+                      </a:pPr>
+                      <a:r>
+                        <a:rPr lang="en-US">
+                          <a:effectLst/>
+                        </a:rPr>
+                        <a:t>Safety</a:t>
+                      </a:r>
+                    </a:p>
+                  </a:txBody>
+                  <a:tcPr marL="82550" marR="82550" marT="38100" marB="38100" anchor="ctr"/>
+                </a:tc>
+                <a:tc>
+                  <a:txBody>
+                    <a:bodyPr/>
+                    <a:lstStyle/>
+                    <a:p>
+                      <a:pPr>
+                        <a:buNone/>
+                      </a:pPr>
+                      <a:r>
+                        <a:rPr lang="en-US" dirty="0">
+                          <a:effectLst/>
+                        </a:rPr>
+                        <a:t>Input validation, boundaries, fallbacks, transparency</a:t>
+                      </a:r>
+                    </a:p>
+                  </a:txBody>
+                  <a:tcPr marL="82550" marR="82550" marT="38100" marB="38100" anchor="ctr"/>
+                </a:tc>
+                <a:extLst>
+                  <a:ext uri="{0D108BD9-81ED-4DB2-BD59-A6C34878D82A}">
+                    <a16:rowId xmlns:a16="http://schemas.microsoft.com/office/drawing/2014/main" val="1297956392"/>
+                  </a:ext>
+                </a:extLst>
+              </a:tr>
+            </a:tbl>
+          </a:graphicData>
+        </a:graphic>
+      </p:graphicFrame>
+      <p:sp>
+        <p:nvSpPr>
+          <p:cNvPr id="3" name="TextBox 2">
+            <a:extLst>
+              <a:ext uri="{FF2B5EF4-FFF2-40B4-BE49-F238E27FC236}">
+                <a16:creationId xmlns:a16="http://schemas.microsoft.com/office/drawing/2014/main" id="{E6F5AE82-2E85-5B12-9761-76F4276FAB78}"/>
+              </a:ext>
+            </a:extLst>
+          </p:cNvPr>
           <p:cNvSpPr txBox="1"/>
           <p:nvPr/>
         </p:nvSpPr>
         <p:spPr>
           <a:xfrm>
-            <a:off x="580000" y="640000"/>
-            <a:ext cx="11032000" cy="520000"/>
+            <a:off x="2634343" y="4754694"/>
+            <a:ext cx="2024743" cy="769441"/>
           </a:xfrm>
           <a:prstGeom prst="rect">
             <a:avLst/>
           </a:prstGeom>
           <a:noFill/>
-          <a:ln>
-            <a:noFill/>
-          </a:ln>
-        </p:spPr>
-        <p:txBody>
-          <a:bodyPr lIns="91440" tIns="91440" rIns="91440" bIns="91440" anchor="ctr">
-            <a:normAutofit fontScale="92500" lnSpcReduction="20000"/>
+        </p:spPr>
+        <p:txBody>
+          <a:bodyPr wrap="square" rtlCol="0">
+            <a:spAutoFit/>
           </a:bodyPr>
           <a:lstStyle/>
           <a:p>
-            <a:pPr algn="l">
-              <a:buNone/>
-            </a:pPr>
-            <a:r>
-              <a:rPr lang="en-US" sz="2800" b="1" dirty="0">
-                <a:solidFill>
-                  <a:srgbClr val="FFFFFF"/>
-                </a:solidFill>
-              </a:rPr>
-              <a:t>FEATURED PROJECTS</a:t>
-            </a:r>
-          </a:p>
-        </p:txBody>
-      </p:sp>
-      <p:sp>
-        <p:nvSpPr>
-          <p:cNvPr id="15" name="TitleLine"/>
-          <p:cNvSpPr>
-            <a:spLocks noTextEdit="1"/>
-          </p:cNvSpPr>
-          <p:nvPr/>
-        </p:nvSpPr>
-        <p:spPr>
-          <a:xfrm>
-            <a:off x="580000" y="1200000"/>
-            <a:ext cx="3200000" cy="60000"/>
-          </a:xfrm>
-          <a:prstGeom prst="rect">
-            <a:avLst/>
-          </a:prstGeom>
-          <a:solidFill>
-            <a:srgbClr val="7CEBFF"/>
-          </a:solidFill>
-          <a:ln>
-            <a:noFill/>
-          </a:ln>
-        </p:spPr>
-        <p:txBody>
-          <a:bodyPr/>
-          <a:lstStyle/>
-          <a:p>
-            <a:endParaRPr lang="en-US"/>
-          </a:p>
-        </p:txBody>
-      </p:sp>
-      <p:sp>
-        <p:nvSpPr>
-          <p:cNvPr id="20" name="Card0"/>
-          <p:cNvSpPr>
-            <a:spLocks noTextEdit="1"/>
-          </p:cNvSpPr>
-          <p:nvPr/>
-        </p:nvSpPr>
-        <p:spPr>
-          <a:xfrm>
-            <a:off x="350000" y="1380000"/>
-            <a:ext cx="3600000" cy="4900000"/>
-          </a:xfrm>
-          <a:prstGeom prst="rect">
-            <a:avLst/>
-          </a:prstGeom>
-          <a:solidFill>
-            <a:srgbClr val="0A2A5C"/>
-          </a:solidFill>
-          <a:ln w="19050">
-            <a:solidFill>
-              <a:srgbClr val="7CEBFF"/>
-            </a:solidFill>
-          </a:ln>
-        </p:spPr>
-        <p:txBody>
-          <a:bodyPr/>
-          <a:lstStyle/>
-          <a:p>
-            <a:endParaRPr lang="en-US"/>
-          </a:p>
-        </p:txBody>
-      </p:sp>
-      <p:sp>
-        <p:nvSpPr>
-          <p:cNvPr id="21" name="Badge0"/>
-          <p:cNvSpPr>
-            <a:spLocks noTextEdit="1"/>
-          </p:cNvSpPr>
-          <p:nvPr/>
-        </p:nvSpPr>
-        <p:spPr>
-          <a:xfrm>
-            <a:off x="350000" y="1380000"/>
-            <a:ext cx="3600000" cy="220000"/>
-          </a:xfrm>
-          <a:prstGeom prst="rect">
-            <a:avLst/>
-          </a:prstGeom>
-          <a:solidFill>
-            <a:srgbClr val="7CEBFF"/>
-          </a:solidFill>
-          <a:ln>
-            <a:noFill/>
-          </a:ln>
-        </p:spPr>
-        <p:txBody>
-          <a:bodyPr/>
-          <a:lstStyle/>
-          <a:p>
-            <a:endParaRPr lang="en-US"/>
-          </a:p>
-        </p:txBody>
-      </p:sp>
-      <p:sp>
-        <p:nvSpPr>
-          <p:cNvPr id="22" name="BadgeTxt0"/>
-          <p:cNvSpPr txBox="1"/>
-          <p:nvPr/>
-        </p:nvSpPr>
-        <p:spPr>
-          <a:xfrm>
-            <a:off x="350000" y="1380000"/>
-            <a:ext cx="3600000" cy="220000"/>
-          </a:xfrm>
-          <a:prstGeom prst="rect">
-            <a:avLst/>
-          </a:prstGeom>
-          <a:noFill/>
-          <a:ln>
-            <a:noFill/>
-          </a:ln>
-        </p:spPr>
-        <p:txBody>
-          <a:bodyPr lIns="91440" tIns="91440" rIns="91440" bIns="91440" anchor="ctr">
-            <a:normAutofit fontScale="32500" lnSpcReduction="20000"/>
-          </a:bodyPr>
-          <a:lstStyle/>
-          <a:p>
-            <a:pPr algn="ctr">
-              <a:buNone/>
-            </a:pPr>
-            <a:r>
-              <a:rPr lang="en-US" sz="1000" b="1" dirty="0">
-                <a:solidFill>
-                  <a:srgbClr val="050F2E"/>
-                </a:solidFill>
-              </a:rPr>
-              <a:t>AI SECURITY</a:t>
-            </a:r>
-          </a:p>
-        </p:txBody>
-      </p:sp>
-      <p:sp>
-        <p:nvSpPr>
-          <p:cNvPr id="23" name="PTitle0"/>
-          <p:cNvSpPr txBox="1"/>
-          <p:nvPr/>
-        </p:nvSpPr>
-        <p:spPr>
-          <a:xfrm>
-            <a:off x="470000" y="1670000"/>
-            <a:ext cx="3360000" cy="520000"/>
-          </a:xfrm>
-          <a:prstGeom prst="rect">
-            <a:avLst/>
-          </a:prstGeom>
-          <a:noFill/>
-          <a:ln>
-            <a:noFill/>
-          </a:ln>
-        </p:spPr>
-        <p:txBody>
-          <a:bodyPr lIns="91440" tIns="91440" rIns="91440" bIns="91440" anchor="t">
-            <a:normAutofit/>
-          </a:bodyPr>
-          <a:lstStyle/>
-          <a:p>
-            <a:pPr algn="l">
-              <a:buNone/>
-            </a:pPr>
-            <a:r>
-              <a:rPr lang="en-US" sz="1800" b="1" dirty="0">
-                <a:solidFill>
-                  <a:srgbClr val="FFFFFF"/>
-                </a:solidFill>
-              </a:rPr>
-              <a:t>Secure Oracle Initiative</a:t>
-            </a:r>
-          </a:p>
-        </p:txBody>
-      </p:sp>
-      <p:sp>
-        <p:nvSpPr>
-          <p:cNvPr id="24" name="PDesc0"/>
-          <p:cNvSpPr txBox="1"/>
-          <p:nvPr/>
-        </p:nvSpPr>
-        <p:spPr>
-          <a:xfrm>
-            <a:off x="470000" y="2260000"/>
-            <a:ext cx="3360000" cy="1200000"/>
-          </a:xfrm>
-          <a:prstGeom prst="rect">
-            <a:avLst/>
-          </a:prstGeom>
-          <a:noFill/>
-          <a:ln>
-            <a:noFill/>
-          </a:ln>
-        </p:spPr>
-        <p:txBody>
-          <a:bodyPr lIns="91440" tIns="91440" rIns="91440" bIns="91440" anchor="t">
-            <a:normAutofit/>
-          </a:bodyPr>
-          <a:lstStyle/>
-          <a:p>
-            <a:pPr algn="l">
-              <a:buNone/>
-            </a:pPr>
-            <a:r>
-              <a:rPr lang="en-US" sz="1300" dirty="0">
-                <a:solidFill>
-                  <a:srgbClr val="CCDDFF"/>
-                </a:solidFill>
-              </a:rPr>
-              <a:t>Dual-shield RAG pipeline protecting healthcare patient data from unauthorized LLM retrieval, with live breach detection.</a:t>
-            </a:r>
-          </a:p>
-        </p:txBody>
-      </p:sp>
-      <p:sp>
-        <p:nvSpPr>
-          <p:cNvPr id="25" name="Div0"/>
-          <p:cNvSpPr>
-            <a:spLocks noTextEdit="1"/>
-          </p:cNvSpPr>
-          <p:nvPr/>
-        </p:nvSpPr>
-        <p:spPr>
-          <a:xfrm>
-            <a:off x="470000" y="3560000"/>
-            <a:ext cx="3360000" cy="40000"/>
-          </a:xfrm>
-          <a:prstGeom prst="rect">
-            <a:avLst/>
-          </a:prstGeom>
-          <a:solidFill>
-            <a:srgbClr val="7CEBFF"/>
-          </a:solidFill>
-          <a:ln>
-            <a:noFill/>
-          </a:ln>
-        </p:spPr>
-        <p:txBody>
-          <a:bodyPr/>
-          <a:lstStyle/>
-          <a:p>
-            <a:endParaRPr lang="en-US"/>
-          </a:p>
-        </p:txBody>
-      </p:sp>
-      <p:sp>
-        <p:nvSpPr>
-          <p:cNvPr id="26" name="TechLabel0"/>
-          <p:cNvSpPr txBox="1"/>
-          <p:nvPr/>
-        </p:nvSpPr>
-        <p:spPr>
-          <a:xfrm>
-            <a:off x="470000" y="3690000"/>
-            <a:ext cx="3360000" cy="240000"/>
-          </a:xfrm>
-          <a:prstGeom prst="rect">
-            <a:avLst/>
-          </a:prstGeom>
-          <a:noFill/>
-          <a:ln>
-            <a:noFill/>
-          </a:ln>
-        </p:spPr>
-        <p:txBody>
-          <a:bodyPr lIns="91440" tIns="91440" rIns="91440" bIns="91440" anchor="t">
-            <a:normAutofit fontScale="47500" lnSpcReduction="20000"/>
-          </a:bodyPr>
-          <a:lstStyle/>
-          <a:p>
-            <a:pPr algn="l">
-              <a:buNone/>
-            </a:pPr>
-            <a:r>
-              <a:rPr lang="en-US" sz="900" b="1" dirty="0">
-                <a:solidFill>
-                  <a:srgbClr val="7CEBFF"/>
-                </a:solidFill>
-              </a:rPr>
-              <a:t>STACK</a:t>
-            </a:r>
-          </a:p>
-        </p:txBody>
-      </p:sp>
-      <p:sp>
-        <p:nvSpPr>
-          <p:cNvPr id="27" name="PTech0"/>
-          <p:cNvSpPr txBox="1"/>
-          <p:nvPr/>
-        </p:nvSpPr>
-        <p:spPr>
-          <a:xfrm>
-            <a:off x="470000" y="3970000"/>
-            <a:ext cx="3360000" cy="700000"/>
-          </a:xfrm>
-          <a:prstGeom prst="rect">
-            <a:avLst/>
-          </a:prstGeom>
-          <a:noFill/>
-          <a:ln>
-            <a:noFill/>
-          </a:ln>
-        </p:spPr>
-        <p:txBody>
-          <a:bodyPr lIns="91440" tIns="91440" rIns="91440" bIns="91440" anchor="t">
-            <a:normAutofit/>
-          </a:bodyPr>
-          <a:lstStyle/>
-          <a:p>
-            <a:pPr algn="l">
-              <a:buNone/>
-            </a:pPr>
-            <a:r>
-              <a:rPr lang="en-US" sz="1100" i="1" dirty="0">
-                <a:solidFill>
-                  <a:srgbClr val="AABBDD"/>
-                </a:solidFill>
-              </a:rPr>
-              <a:t>LangChain · ChromaDB · Gradio · NIST AI RMF · Google Colab</a:t>
-            </a:r>
-          </a:p>
-        </p:txBody>
-      </p:sp>
-      <p:sp>
-        <p:nvSpPr>
-          <p:cNvPr id="28" name="LinkBg0"/>
-          <p:cNvSpPr>
-            <a:spLocks noTextEdit="1"/>
-          </p:cNvSpPr>
-          <p:nvPr/>
-        </p:nvSpPr>
-        <p:spPr>
-          <a:xfrm>
-            <a:off x="470000" y="5840000"/>
-            <a:ext cx="3360000" cy="270000"/>
-          </a:xfrm>
-          <a:prstGeom prst="rect">
-            <a:avLst/>
-          </a:prstGeom>
-          <a:solidFill>
-            <a:srgbClr val="0D2149"/>
-          </a:solidFill>
-          <a:ln w="9525">
-            <a:solidFill>
-              <a:srgbClr val="7CEBFF"/>
-            </a:solidFill>
-          </a:ln>
-        </p:spPr>
-        <p:txBody>
-          <a:bodyPr/>
-          <a:lstStyle/>
-          <a:p>
-            <a:endParaRPr lang="en-US"/>
-          </a:p>
-        </p:txBody>
-      </p:sp>
-      <p:sp>
-        <p:nvSpPr>
-          <p:cNvPr id="29" name="LinkTxt0"/>
-          <p:cNvSpPr txBox="1"/>
-          <p:nvPr/>
-        </p:nvSpPr>
-        <p:spPr>
-          <a:xfrm>
-            <a:off x="470000" y="5512800"/>
-            <a:ext cx="3360000" cy="597200"/>
-          </a:xfrm>
-          <a:prstGeom prst="rect">
-            <a:avLst/>
-          </a:prstGeom>
-          <a:noFill/>
-          <a:ln>
-            <a:noFill/>
-          </a:ln>
-        </p:spPr>
-        <p:txBody>
-          <a:bodyPr lIns="91440" tIns="91440" rIns="91440" bIns="91440" anchor="ctr">
-            <a:normAutofit/>
-          </a:bodyPr>
-          <a:lstStyle/>
-          <a:p>
-            <a:pPr algn="ctr">
-              <a:buNone/>
-            </a:pPr>
-            <a:r>
-              <a:rPr lang="en-US" sz="1050" dirty="0">
-                <a:solidFill>
-                  <a:srgbClr val="7CEBFF"/>
-                </a:solidFill>
-              </a:rPr>
-              <a:t>🔗 </a:t>
-            </a:r>
-          </a:p>
-        </p:txBody>
-      </p:sp>
-      <p:sp>
-        <p:nvSpPr>
-          <p:cNvPr id="32" name="Card1"/>
-          <p:cNvSpPr>
-            <a:spLocks noTextEdit="1"/>
-          </p:cNvSpPr>
-          <p:nvPr/>
-        </p:nvSpPr>
-        <p:spPr>
-          <a:xfrm>
-            <a:off x="4150000" y="1380000"/>
-            <a:ext cx="3600000" cy="4900000"/>
-          </a:xfrm>
-          <a:prstGeom prst="rect">
-            <a:avLst/>
-          </a:prstGeom>
-          <a:solidFill>
-            <a:srgbClr val="0A2A5C"/>
-          </a:solidFill>
-          <a:ln w="19050">
-            <a:solidFill>
-              <a:srgbClr val="4AC8FF"/>
-            </a:solidFill>
-          </a:ln>
-        </p:spPr>
-        <p:txBody>
-          <a:bodyPr/>
-          <a:lstStyle/>
-          <a:p>
-            <a:endParaRPr lang="en-US"/>
-          </a:p>
-        </p:txBody>
-      </p:sp>
-      <p:sp>
-        <p:nvSpPr>
-          <p:cNvPr id="33" name="Badge1"/>
-          <p:cNvSpPr>
-            <a:spLocks noTextEdit="1"/>
-          </p:cNvSpPr>
-          <p:nvPr/>
-        </p:nvSpPr>
-        <p:spPr>
-          <a:xfrm>
-            <a:off x="4150000" y="1380000"/>
-            <a:ext cx="3600000" cy="220000"/>
-          </a:xfrm>
-          <a:prstGeom prst="rect">
-            <a:avLst/>
-          </a:prstGeom>
-          <a:solidFill>
-            <a:srgbClr val="4AC8FF"/>
-          </a:solidFill>
-          <a:ln>
-            <a:noFill/>
-          </a:ln>
-        </p:spPr>
-        <p:txBody>
-          <a:bodyPr/>
-          <a:lstStyle/>
-          <a:p>
-            <a:endParaRPr lang="en-US"/>
-          </a:p>
-        </p:txBody>
-      </p:sp>
-      <p:sp>
-        <p:nvSpPr>
-          <p:cNvPr id="34" name="BadgeTxt1"/>
-          <p:cNvSpPr txBox="1"/>
-          <p:nvPr/>
-        </p:nvSpPr>
-        <p:spPr>
-          <a:xfrm>
-            <a:off x="4150000" y="1380000"/>
-            <a:ext cx="3600000" cy="220000"/>
-          </a:xfrm>
-          <a:prstGeom prst="rect">
-            <a:avLst/>
-          </a:prstGeom>
-          <a:noFill/>
-          <a:ln>
-            <a:noFill/>
-          </a:ln>
-        </p:spPr>
-        <p:txBody>
-          <a:bodyPr lIns="91440" tIns="91440" rIns="91440" bIns="91440" anchor="ctr">
-            <a:normAutofit fontScale="32500" lnSpcReduction="20000"/>
-          </a:bodyPr>
-          <a:lstStyle/>
-          <a:p>
-            <a:pPr algn="ctr">
-              <a:buNone/>
-            </a:pPr>
-            <a:r>
-              <a:rPr lang="en-US" sz="1000" b="1" dirty="0">
-                <a:solidFill>
-                  <a:srgbClr val="050F2E"/>
-                </a:solidFill>
-              </a:rPr>
-              <a:t>NLP</a:t>
-            </a:r>
-          </a:p>
-        </p:txBody>
-      </p:sp>
-      <p:sp>
-        <p:nvSpPr>
-          <p:cNvPr id="35" name="PTitle1"/>
-          <p:cNvSpPr txBox="1"/>
-          <p:nvPr/>
-        </p:nvSpPr>
-        <p:spPr>
-          <a:xfrm>
-            <a:off x="4270000" y="1670000"/>
-            <a:ext cx="3360000" cy="520000"/>
-          </a:xfrm>
-          <a:prstGeom prst="rect">
-            <a:avLst/>
-          </a:prstGeom>
-          <a:noFill/>
-          <a:ln>
-            <a:noFill/>
-          </a:ln>
-        </p:spPr>
-        <p:txBody>
-          <a:bodyPr lIns="91440" tIns="91440" rIns="91440" bIns="91440" anchor="t">
-            <a:normAutofit/>
-          </a:bodyPr>
-          <a:lstStyle/>
-          <a:p>
-            <a:pPr algn="l">
-              <a:buNone/>
-            </a:pPr>
-            <a:r>
-              <a:rPr lang="en-US" sz="1800" b="1" dirty="0">
-                <a:solidFill>
-                  <a:srgbClr val="FFFFFF"/>
-                </a:solidFill>
-              </a:rPr>
-              <a:t>NewsBot 2.0</a:t>
-            </a:r>
-          </a:p>
-        </p:txBody>
-      </p:sp>
-      <p:sp>
-        <p:nvSpPr>
-          <p:cNvPr id="36" name="PDesc1"/>
-          <p:cNvSpPr txBox="1"/>
-          <p:nvPr/>
-        </p:nvSpPr>
-        <p:spPr>
-          <a:xfrm>
-            <a:off x="4270000" y="2260000"/>
-            <a:ext cx="3360000" cy="1200000"/>
-          </a:xfrm>
-          <a:prstGeom prst="rect">
-            <a:avLst/>
-          </a:prstGeom>
-          <a:noFill/>
-          <a:ln>
-            <a:noFill/>
-          </a:ln>
-        </p:spPr>
-        <p:txBody>
-          <a:bodyPr lIns="91440" tIns="91440" rIns="91440" bIns="91440" anchor="t">
-            <a:normAutofit/>
-          </a:bodyPr>
-          <a:lstStyle/>
-          <a:p>
-            <a:pPr algn="l">
-              <a:buNone/>
-            </a:pPr>
-            <a:r>
-              <a:rPr lang="en-US" sz="1300" dirty="0">
-                <a:solidFill>
-                  <a:srgbClr val="CCDDFF"/>
-                </a:solidFill>
-              </a:rPr>
-              <a:t>Modular news intelligence system with LLM Q&amp;A, multilingual support, topic modeling, and abstractive summarization.</a:t>
-            </a:r>
-          </a:p>
-        </p:txBody>
-      </p:sp>
-      <p:sp>
-        <p:nvSpPr>
-          <p:cNvPr id="37" name="Div1"/>
-          <p:cNvSpPr>
-            <a:spLocks noTextEdit="1"/>
-          </p:cNvSpPr>
-          <p:nvPr/>
-        </p:nvSpPr>
-        <p:spPr>
-          <a:xfrm>
-            <a:off x="4270000" y="3560000"/>
-            <a:ext cx="3360000" cy="40000"/>
-          </a:xfrm>
-          <a:prstGeom prst="rect">
-            <a:avLst/>
-          </a:prstGeom>
-          <a:solidFill>
-            <a:srgbClr val="4AC8FF"/>
-          </a:solidFill>
-          <a:ln>
-            <a:noFill/>
-          </a:ln>
-        </p:spPr>
-        <p:txBody>
-          <a:bodyPr/>
-          <a:lstStyle/>
-          <a:p>
-            <a:endParaRPr lang="en-US"/>
-          </a:p>
-        </p:txBody>
-      </p:sp>
-      <p:sp>
-        <p:nvSpPr>
-          <p:cNvPr id="38" name="TechLabel1"/>
-          <p:cNvSpPr txBox="1"/>
-          <p:nvPr/>
-        </p:nvSpPr>
-        <p:spPr>
-          <a:xfrm>
-            <a:off x="4270000" y="3690000"/>
-            <a:ext cx="3360000" cy="240000"/>
-          </a:xfrm>
-          <a:prstGeom prst="rect">
-            <a:avLst/>
-          </a:prstGeom>
-          <a:noFill/>
-          <a:ln>
-            <a:noFill/>
-          </a:ln>
-        </p:spPr>
-        <p:txBody>
-          <a:bodyPr lIns="91440" tIns="91440" rIns="91440" bIns="91440" anchor="t">
-            <a:normAutofit fontScale="47500" lnSpcReduction="20000"/>
-          </a:bodyPr>
-          <a:lstStyle/>
-          <a:p>
-            <a:pPr algn="l">
-              <a:buNone/>
-            </a:pPr>
-            <a:r>
-              <a:rPr lang="en-US" sz="900" b="1" dirty="0">
-                <a:solidFill>
-                  <a:srgbClr val="4AC8FF"/>
-                </a:solidFill>
-              </a:rPr>
-              <a:t>STACK</a:t>
-            </a:r>
-          </a:p>
-        </p:txBody>
-      </p:sp>
-      <p:sp>
-        <p:nvSpPr>
-          <p:cNvPr id="39" name="PTech1"/>
-          <p:cNvSpPr txBox="1"/>
-          <p:nvPr/>
-        </p:nvSpPr>
-        <p:spPr>
-          <a:xfrm>
-            <a:off x="4270000" y="3970000"/>
-            <a:ext cx="3360000" cy="700000"/>
-          </a:xfrm>
-          <a:prstGeom prst="rect">
-            <a:avLst/>
-          </a:prstGeom>
-          <a:noFill/>
-          <a:ln>
-            <a:noFill/>
-          </a:ln>
-        </p:spPr>
-        <p:txBody>
-          <a:bodyPr lIns="91440" tIns="91440" rIns="91440" bIns="91440" anchor="t">
-            <a:normAutofit/>
-          </a:bodyPr>
-          <a:lstStyle/>
-          <a:p>
-            <a:pPr algn="l">
-              <a:buNone/>
-            </a:pPr>
-            <a:r>
-              <a:rPr lang="en-US" sz="1100" i="1" dirty="0">
-                <a:solidFill>
-                  <a:srgbClr val="AABBDD"/>
-                </a:solidFill>
-              </a:rPr>
-              <a:t>LLaMA 3.2 · Ollama · spaCy · NLTK · LDA · Gradio</a:t>
-            </a:r>
-          </a:p>
-        </p:txBody>
-      </p:sp>
-      <p:sp>
-        <p:nvSpPr>
-          <p:cNvPr id="40" name="LinkBg1"/>
-          <p:cNvSpPr>
-            <a:spLocks noTextEdit="1"/>
-          </p:cNvSpPr>
-          <p:nvPr/>
-        </p:nvSpPr>
-        <p:spPr>
-          <a:xfrm>
-            <a:off x="4270000" y="5840000"/>
-            <a:ext cx="3360000" cy="270000"/>
-          </a:xfrm>
-          <a:prstGeom prst="rect">
-            <a:avLst/>
-          </a:prstGeom>
-          <a:solidFill>
-            <a:srgbClr val="0D2149"/>
-          </a:solidFill>
-          <a:ln w="9525">
-            <a:solidFill>
-              <a:srgbClr val="4AC8FF"/>
-            </a:solidFill>
-          </a:ln>
-        </p:spPr>
-        <p:txBody>
-          <a:bodyPr/>
-          <a:lstStyle/>
-          <a:p>
-            <a:endParaRPr lang="en-US"/>
-          </a:p>
-        </p:txBody>
-      </p:sp>
-      <p:sp>
-        <p:nvSpPr>
-          <p:cNvPr id="41" name="LinkTxt1"/>
-          <p:cNvSpPr txBox="1"/>
-          <p:nvPr/>
-        </p:nvSpPr>
-        <p:spPr>
-          <a:xfrm>
-            <a:off x="4270000" y="5670000"/>
-            <a:ext cx="3360000" cy="440000"/>
-          </a:xfrm>
-          <a:prstGeom prst="rect">
-            <a:avLst/>
-          </a:prstGeom>
-          <a:noFill/>
-          <a:ln>
-            <a:noFill/>
-          </a:ln>
-        </p:spPr>
-        <p:txBody>
-          <a:bodyPr lIns="91440" tIns="91440" rIns="91440" bIns="91440" anchor="ctr">
-            <a:normAutofit/>
-          </a:bodyPr>
-          <a:lstStyle/>
-          <a:p>
-            <a:pPr algn="ctr">
-              <a:buNone/>
-            </a:pPr>
-            <a:r>
-              <a:rPr lang="en-US" sz="1050" dirty="0" err="1">
-                <a:solidFill>
-                  <a:schemeClr val="bg2"/>
+            <a:r>
+              <a:rPr lang="en-US" sz="4400" dirty="0" err="1">
+                <a:solidFill>
+                  <a:srgbClr val="00B0F0"/>
                 </a:solidFill>
                 <a:hlinkClick r:id="rId2">
                   <a:extLst>
@@ -7610,45 +7343,9 @@
               </a:rPr>
               <a:t>Github</a:t>
             </a:r>
-            <a:endParaRPr lang="en-US" sz="1050" dirty="0">
+            <a:endParaRPr lang="en-US" dirty="0">
               <a:solidFill>
-                <a:schemeClr val="bg2"/>
-              </a:solidFill>
-            </a:endParaRPr>
-          </a:p>
-        </p:txBody>
-      </p:sp>
-      <p:sp>
-        <p:nvSpPr>
-          <p:cNvPr id="48" name="PDesc2"/>
-          <p:cNvSpPr txBox="1"/>
-          <p:nvPr/>
-        </p:nvSpPr>
-        <p:spPr>
-          <a:xfrm>
-            <a:off x="8070000" y="2260000"/>
-            <a:ext cx="3360000" cy="1200000"/>
-          </a:xfrm>
-          <a:prstGeom prst="rect">
-            <a:avLst/>
-          </a:prstGeom>
-          <a:noFill/>
-          <a:ln>
-            <a:noFill/>
-          </a:ln>
-        </p:spPr>
-        <p:txBody>
-          <a:bodyPr lIns="91440" tIns="91440" rIns="91440" bIns="91440" anchor="t">
-            <a:normAutofit/>
-          </a:bodyPr>
-          <a:lstStyle/>
-          <a:p>
-            <a:pPr algn="l">
-              <a:buNone/>
-            </a:pPr>
-            <a:endParaRPr lang="en-US" sz="1300" dirty="0">
-              <a:solidFill>
-                <a:srgbClr val="CCDDFF"/>
+                <a:srgbClr val="00B0F0"/>
               </a:solidFill>
             </a:endParaRPr>
           </a:p>
@@ -7662,7 +7359,1115 @@
 </p:sld>
 </file>
 
-<file path=ppt/slides/slide4.xml><?xml version="1.0" encoding="utf-8"?>
+<file path=ppt/slides/slide5.xml><?xml version="1.0" encoding="utf-8"?>
+<p:sld xmlns:a="http://schemas.openxmlformats.org/drawingml/2006/main" xmlns:r="http://schemas.openxmlformats.org/officeDocument/2006/relationships" xmlns:p="http://schemas.openxmlformats.org/presentationml/2006/main">
+  <p:cSld>
+    <p:spTree>
+      <p:nvGrpSpPr>
+        <p:cNvPr id="1" name="">
+          <a:extLst>
+            <a:ext uri="{FF2B5EF4-FFF2-40B4-BE49-F238E27FC236}">
+              <a16:creationId xmlns:a16="http://schemas.microsoft.com/office/drawing/2014/main" id="{9836AA77-D89B-EADB-C5C8-566A6A21E7BE}"/>
+            </a:ext>
+          </a:extLst>
+        </p:cNvPr>
+        <p:cNvGrpSpPr/>
+        <p:nvPr/>
+      </p:nvGrpSpPr>
+      <p:grpSpPr>
+        <a:xfrm>
+          <a:off x="0" y="0"/>
+          <a:ext cx="0" cy="0"/>
+          <a:chOff x="0" y="0"/>
+          <a:chExt cx="0" cy="0"/>
+        </a:xfrm>
+      </p:grpSpPr>
+      <p:sp>
+        <p:nvSpPr>
+          <p:cNvPr id="6" name="Title 1">
+            <a:extLst>
+              <a:ext uri="{FF2B5EF4-FFF2-40B4-BE49-F238E27FC236}">
+                <a16:creationId xmlns:a16="http://schemas.microsoft.com/office/drawing/2014/main" id="{D79FCB31-775B-15D5-16B6-042C0E4BE2B8}"/>
+              </a:ext>
+            </a:extLst>
+          </p:cNvPr>
+          <p:cNvSpPr>
+            <a:spLocks noGrp="1"/>
+          </p:cNvSpPr>
+          <p:nvPr>
+            <p:ph type="title"/>
+          </p:nvPr>
+        </p:nvSpPr>
+        <p:spPr>
+          <a:xfrm>
+            <a:off x="581192" y="1001486"/>
+            <a:ext cx="11029616" cy="805543"/>
+          </a:xfrm>
+        </p:spPr>
+        <p:txBody>
+          <a:bodyPr>
+            <a:normAutofit fontScale="90000"/>
+          </a:bodyPr>
+          <a:lstStyle/>
+          <a:p>
+            <a:br>
+              <a:rPr lang="en-US" dirty="0"/>
+            </a:br>
+            <a:br>
+              <a:rPr lang="en-US" dirty="0"/>
+            </a:br>
+            <a:r>
+              <a:rPr lang="en-US" dirty="0"/>
+              <a:t>NLP :</a:t>
+            </a:r>
+            <a:r>
+              <a:rPr lang="en-US" b="1" dirty="0" err="1"/>
+              <a:t>NewsBot</a:t>
+            </a:r>
+            <a:r>
+              <a:rPr lang="en-US" b="1" dirty="0"/>
+              <a:t> Intelligence System 2.0</a:t>
+            </a:r>
+            <a:br>
+              <a:rPr lang="en-US" b="1" dirty="0"/>
+            </a:br>
+            <a:br>
+              <a:rPr lang="en-US" b="1" dirty="0"/>
+            </a:br>
+            <a:endParaRPr lang="en-US" dirty="0"/>
+          </a:p>
+        </p:txBody>
+      </p:sp>
+      <p:sp>
+        <p:nvSpPr>
+          <p:cNvPr id="3" name="TextBox 2">
+            <a:extLst>
+              <a:ext uri="{FF2B5EF4-FFF2-40B4-BE49-F238E27FC236}">
+                <a16:creationId xmlns:a16="http://schemas.microsoft.com/office/drawing/2014/main" id="{688B10E8-F991-E451-58FB-6A455927648E}"/>
+              </a:ext>
+            </a:extLst>
+          </p:cNvPr>
+          <p:cNvSpPr txBox="1"/>
+          <p:nvPr/>
+        </p:nvSpPr>
+        <p:spPr>
+          <a:xfrm>
+            <a:off x="2634343" y="4754694"/>
+            <a:ext cx="2024743" cy="769441"/>
+          </a:xfrm>
+          <a:prstGeom prst="rect">
+            <a:avLst/>
+          </a:prstGeom>
+          <a:noFill/>
+        </p:spPr>
+        <p:txBody>
+          <a:bodyPr wrap="square" rtlCol="0">
+            <a:spAutoFit/>
+          </a:bodyPr>
+          <a:lstStyle/>
+          <a:p>
+            <a:r>
+              <a:rPr lang="en-US" sz="4400" dirty="0" err="1">
+                <a:solidFill>
+                  <a:srgbClr val="00B0F0"/>
+                </a:solidFill>
+                <a:hlinkClick r:id="rId2">
+                  <a:extLst>
+                    <a:ext uri="{A12FA001-AC4F-418D-AE19-62706E023703}">
+                      <ahyp:hlinkClr xmlns:ahyp="http://schemas.microsoft.com/office/drawing/2018/hyperlinkcolor" val="tx"/>
+                    </a:ext>
+                  </a:extLst>
+                </a:hlinkClick>
+              </a:rPr>
+              <a:t>Github</a:t>
+            </a:r>
+            <a:endParaRPr lang="en-US" dirty="0">
+              <a:solidFill>
+                <a:srgbClr val="00B0F0"/>
+              </a:solidFill>
+            </a:endParaRPr>
+          </a:p>
+        </p:txBody>
+      </p:sp>
+      <p:graphicFrame>
+        <p:nvGraphicFramePr>
+          <p:cNvPr id="7" name="Content Placeholder 6">
+            <a:extLst>
+              <a:ext uri="{FF2B5EF4-FFF2-40B4-BE49-F238E27FC236}">
+                <a16:creationId xmlns:a16="http://schemas.microsoft.com/office/drawing/2014/main" id="{F31C0B3C-49F7-3D1E-E7BB-7112FC5F8040}"/>
+              </a:ext>
+            </a:extLst>
+          </p:cNvPr>
+          <p:cNvGraphicFramePr>
+            <a:graphicFrameLocks noGrp="1"/>
+          </p:cNvGraphicFramePr>
+          <p:nvPr>
+            <p:ph idx="1"/>
+            <p:extLst>
+              <p:ext uri="{D42A27DB-BD31-4B8C-83A1-F6EECF244321}">
+                <p14:modId xmlns:p14="http://schemas.microsoft.com/office/powerpoint/2010/main" val="2265041722"/>
+              </p:ext>
+            </p:extLst>
+          </p:nvPr>
+        </p:nvGraphicFramePr>
+        <p:xfrm>
+          <a:off x="581025" y="2687320"/>
+          <a:ext cx="11029950" cy="3474720"/>
+        </p:xfrm>
+        <a:graphic>
+          <a:graphicData uri="http://schemas.openxmlformats.org/drawingml/2006/table">
+            <a:tbl>
+              <a:tblPr firstRow="1" bandRow="1">
+                <a:tableStyleId>{5C22544A-7EE6-4342-B048-85BDC9FD1C3A}</a:tableStyleId>
+              </a:tblPr>
+              <a:tblGrid>
+                <a:gridCol w="3676650">
+                  <a:extLst>
+                    <a:ext uri="{9D8B030D-6E8A-4147-A177-3AD203B41FA5}">
+                      <a16:colId xmlns:a16="http://schemas.microsoft.com/office/drawing/2014/main" val="3933585118"/>
+                    </a:ext>
+                  </a:extLst>
+                </a:gridCol>
+                <a:gridCol w="3676650">
+                  <a:extLst>
+                    <a:ext uri="{9D8B030D-6E8A-4147-A177-3AD203B41FA5}">
+                      <a16:colId xmlns:a16="http://schemas.microsoft.com/office/drawing/2014/main" val="3109288217"/>
+                    </a:ext>
+                  </a:extLst>
+                </a:gridCol>
+                <a:gridCol w="3676650">
+                  <a:extLst>
+                    <a:ext uri="{9D8B030D-6E8A-4147-A177-3AD203B41FA5}">
+                      <a16:colId xmlns:a16="http://schemas.microsoft.com/office/drawing/2014/main" val="3703199940"/>
+                    </a:ext>
+                  </a:extLst>
+                </a:gridCol>
+              </a:tblGrid>
+              <a:tr h="0">
+                <a:tc>
+                  <a:txBody>
+                    <a:bodyPr/>
+                    <a:lstStyle/>
+                    <a:p>
+                      <a:pPr>
+                        <a:buNone/>
+                      </a:pPr>
+                      <a:r>
+                        <a:rPr lang="en-US" b="1" dirty="0">
+                          <a:effectLst/>
+                        </a:rPr>
+                        <a:t>Module</a:t>
+                      </a:r>
+                    </a:p>
+                  </a:txBody>
+                  <a:tcPr marL="82550" marR="82550" marT="38100" marB="38100" anchor="ctr"/>
+                </a:tc>
+                <a:tc>
+                  <a:txBody>
+                    <a:bodyPr/>
+                    <a:lstStyle/>
+                    <a:p>
+                      <a:pPr>
+                        <a:buNone/>
+                      </a:pPr>
+                      <a:r>
+                        <a:rPr lang="en-US" b="1" dirty="0">
+                          <a:effectLst/>
+                        </a:rPr>
+                        <a:t>Capability</a:t>
+                      </a:r>
+                    </a:p>
+                  </a:txBody>
+                  <a:tcPr marL="82550" marR="82550" marT="38100" marB="38100" anchor="ctr"/>
+                </a:tc>
+                <a:tc>
+                  <a:txBody>
+                    <a:bodyPr/>
+                    <a:lstStyle/>
+                    <a:p>
+                      <a:pPr>
+                        <a:buNone/>
+                      </a:pPr>
+                      <a:r>
+                        <a:rPr lang="en-US" b="1">
+                          <a:effectLst/>
+                        </a:rPr>
+                        <a:t>Key Techniques</a:t>
+                      </a:r>
+                    </a:p>
+                  </a:txBody>
+                  <a:tcPr marL="82550" marR="82550" marT="38100" marB="38100" anchor="ctr"/>
+                </a:tc>
+                <a:extLst>
+                  <a:ext uri="{0D108BD9-81ED-4DB2-BD59-A6C34878D82A}">
+                    <a16:rowId xmlns:a16="http://schemas.microsoft.com/office/drawing/2014/main" val="2969972281"/>
+                  </a:ext>
+                </a:extLst>
+              </a:tr>
+              <a:tr h="370840">
+                <a:tc>
+                  <a:txBody>
+                    <a:bodyPr/>
+                    <a:lstStyle/>
+                    <a:p>
+                      <a:pPr>
+                        <a:buNone/>
+                      </a:pPr>
+                      <a:r>
+                        <a:rPr lang="en-US" b="1">
+                          <a:effectLst/>
+                        </a:rPr>
+                        <a:t>A</a:t>
+                      </a:r>
+                      <a:endParaRPr lang="en-US">
+                        <a:effectLst/>
+                      </a:endParaRPr>
+                    </a:p>
+                  </a:txBody>
+                  <a:tcPr marL="82550" marR="82550" marT="38100" marB="38100" anchor="ctr"/>
+                </a:tc>
+                <a:tc>
+                  <a:txBody>
+                    <a:bodyPr/>
+                    <a:lstStyle/>
+                    <a:p>
+                      <a:pPr>
+                        <a:buNone/>
+                      </a:pPr>
+                      <a:r>
+                        <a:rPr lang="en-US" dirty="0">
+                          <a:effectLst/>
+                        </a:rPr>
+                        <a:t>Advanced Content Analysis</a:t>
+                      </a:r>
+                    </a:p>
+                  </a:txBody>
+                  <a:tcPr marL="82550" marR="82550" marT="38100" marB="38100" anchor="ctr"/>
+                </a:tc>
+                <a:tc>
+                  <a:txBody>
+                    <a:bodyPr/>
+                    <a:lstStyle/>
+                    <a:p>
+                      <a:pPr>
+                        <a:buNone/>
+                      </a:pPr>
+                      <a:r>
+                        <a:rPr lang="en-US">
+                          <a:effectLst/>
+                        </a:rPr>
+                        <a:t>LDA, NMF, K-Means clustering, pyLDAvis</a:t>
+                      </a:r>
+                    </a:p>
+                  </a:txBody>
+                  <a:tcPr marL="82550" marR="82550" marT="38100" marB="38100" anchor="ctr"/>
+                </a:tc>
+                <a:extLst>
+                  <a:ext uri="{0D108BD9-81ED-4DB2-BD59-A6C34878D82A}">
+                    <a16:rowId xmlns:a16="http://schemas.microsoft.com/office/drawing/2014/main" val="4123820811"/>
+                  </a:ext>
+                </a:extLst>
+              </a:tr>
+              <a:tr h="370840">
+                <a:tc>
+                  <a:txBody>
+                    <a:bodyPr/>
+                    <a:lstStyle/>
+                    <a:p>
+                      <a:pPr>
+                        <a:buNone/>
+                      </a:pPr>
+                      <a:r>
+                        <a:rPr lang="en-US" b="1">
+                          <a:effectLst/>
+                        </a:rPr>
+                        <a:t>B</a:t>
+                      </a:r>
+                      <a:endParaRPr lang="en-US">
+                        <a:effectLst/>
+                      </a:endParaRPr>
+                    </a:p>
+                  </a:txBody>
+                  <a:tcPr marL="82550" marR="82550" marT="38100" marB="38100" anchor="ctr"/>
+                </a:tc>
+                <a:tc>
+                  <a:txBody>
+                    <a:bodyPr/>
+                    <a:lstStyle/>
+                    <a:p>
+                      <a:pPr>
+                        <a:buNone/>
+                      </a:pPr>
+                      <a:r>
+                        <a:rPr lang="en-US">
+                          <a:effectLst/>
+                        </a:rPr>
+                        <a:t>Language Understanding &amp; Generation</a:t>
+                      </a:r>
+                    </a:p>
+                  </a:txBody>
+                  <a:tcPr marL="82550" marR="82550" marT="38100" marB="38100" anchor="ctr"/>
+                </a:tc>
+                <a:tc>
+                  <a:txBody>
+                    <a:bodyPr/>
+                    <a:lstStyle/>
+                    <a:p>
+                      <a:pPr>
+                        <a:buNone/>
+                      </a:pPr>
+                      <a:r>
+                        <a:rPr lang="en-US">
+                          <a:effectLst/>
+                        </a:rPr>
+                        <a:t>LLM summarization, Q&amp;A, insight generation</a:t>
+                      </a:r>
+                    </a:p>
+                  </a:txBody>
+                  <a:tcPr marL="82550" marR="82550" marT="38100" marB="38100" anchor="ctr"/>
+                </a:tc>
+                <a:extLst>
+                  <a:ext uri="{0D108BD9-81ED-4DB2-BD59-A6C34878D82A}">
+                    <a16:rowId xmlns:a16="http://schemas.microsoft.com/office/drawing/2014/main" val="3970266859"/>
+                  </a:ext>
+                </a:extLst>
+              </a:tr>
+              <a:tr h="370840">
+                <a:tc>
+                  <a:txBody>
+                    <a:bodyPr/>
+                    <a:lstStyle/>
+                    <a:p>
+                      <a:pPr>
+                        <a:buNone/>
+                      </a:pPr>
+                      <a:r>
+                        <a:rPr lang="en-US" b="1">
+                          <a:effectLst/>
+                        </a:rPr>
+                        <a:t>C</a:t>
+                      </a:r>
+                      <a:endParaRPr lang="en-US">
+                        <a:effectLst/>
+                      </a:endParaRPr>
+                    </a:p>
+                  </a:txBody>
+                  <a:tcPr marL="82550" marR="82550" marT="38100" marB="38100" anchor="ctr"/>
+                </a:tc>
+                <a:tc>
+                  <a:txBody>
+                    <a:bodyPr/>
+                    <a:lstStyle/>
+                    <a:p>
+                      <a:pPr>
+                        <a:buNone/>
+                      </a:pPr>
+                      <a:r>
+                        <a:rPr lang="en-US">
+                          <a:effectLst/>
+                        </a:rPr>
+                        <a:t>Multilingual Intelligence</a:t>
+                      </a:r>
+                    </a:p>
+                  </a:txBody>
+                  <a:tcPr marL="82550" marR="82550" marT="38100" marB="38100" anchor="ctr"/>
+                </a:tc>
+                <a:tc>
+                  <a:txBody>
+                    <a:bodyPr/>
+                    <a:lstStyle/>
+                    <a:p>
+                      <a:pPr>
+                        <a:buNone/>
+                      </a:pPr>
+                      <a:r>
+                        <a:rPr lang="en-US">
+                          <a:effectLst/>
+                        </a:rPr>
+                        <a:t>Language detection, translation, cross-lingual sentiment</a:t>
+                      </a:r>
+                    </a:p>
+                  </a:txBody>
+                  <a:tcPr marL="82550" marR="82550" marT="38100" marB="38100" anchor="ctr"/>
+                </a:tc>
+                <a:extLst>
+                  <a:ext uri="{0D108BD9-81ED-4DB2-BD59-A6C34878D82A}">
+                    <a16:rowId xmlns:a16="http://schemas.microsoft.com/office/drawing/2014/main" val="3643339895"/>
+                  </a:ext>
+                </a:extLst>
+              </a:tr>
+              <a:tr h="370840">
+                <a:tc>
+                  <a:txBody>
+                    <a:bodyPr/>
+                    <a:lstStyle/>
+                    <a:p>
+                      <a:pPr>
+                        <a:buNone/>
+                      </a:pPr>
+                      <a:r>
+                        <a:rPr lang="en-US" b="1">
+                          <a:effectLst/>
+                        </a:rPr>
+                        <a:t>D</a:t>
+                      </a:r>
+                      <a:endParaRPr lang="en-US">
+                        <a:effectLst/>
+                      </a:endParaRPr>
+                    </a:p>
+                  </a:txBody>
+                  <a:tcPr marL="82550" marR="82550" marT="38100" marB="38100" anchor="ctr"/>
+                </a:tc>
+                <a:tc>
+                  <a:txBody>
+                    <a:bodyPr/>
+                    <a:lstStyle/>
+                    <a:p>
+                      <a:pPr>
+                        <a:buNone/>
+                      </a:pPr>
+                      <a:r>
+                        <a:rPr lang="en-US">
+                          <a:effectLst/>
+                        </a:rPr>
+                        <a:t>Conversational Interface</a:t>
+                      </a:r>
+                    </a:p>
+                  </a:txBody>
+                  <a:tcPr marL="82550" marR="82550" marT="38100" marB="38100" anchor="ctr"/>
+                </a:tc>
+                <a:tc>
+                  <a:txBody>
+                    <a:bodyPr/>
+                    <a:lstStyle/>
+                    <a:p>
+                      <a:pPr>
+                        <a:buNone/>
+                      </a:pPr>
+                      <a:r>
+                        <a:rPr lang="fr-FR">
+                          <a:effectLst/>
+                        </a:rPr>
+                        <a:t>Intent classification, context management, corpus Q&amp;A</a:t>
+                      </a:r>
+                    </a:p>
+                  </a:txBody>
+                  <a:tcPr marL="82550" marR="82550" marT="38100" marB="38100" anchor="ctr"/>
+                </a:tc>
+                <a:extLst>
+                  <a:ext uri="{0D108BD9-81ED-4DB2-BD59-A6C34878D82A}">
+                    <a16:rowId xmlns:a16="http://schemas.microsoft.com/office/drawing/2014/main" val="1364774439"/>
+                  </a:ext>
+                </a:extLst>
+              </a:tr>
+              <a:tr h="370840">
+                <a:tc>
+                  <a:txBody>
+                    <a:bodyPr/>
+                    <a:lstStyle/>
+                    <a:p>
+                      <a:pPr>
+                        <a:buNone/>
+                      </a:pPr>
+                      <a:r>
+                        <a:rPr lang="en-US" b="1" dirty="0">
+                          <a:effectLst/>
+                        </a:rPr>
+                        <a:t>Bonus</a:t>
+                      </a:r>
+                      <a:endParaRPr lang="en-US" dirty="0">
+                        <a:effectLst/>
+                      </a:endParaRPr>
+                    </a:p>
+                  </a:txBody>
+                  <a:tcPr marL="82550" marR="82550" marT="38100" marB="38100" anchor="ctr"/>
+                </a:tc>
+                <a:tc>
+                  <a:txBody>
+                    <a:bodyPr/>
+                    <a:lstStyle/>
+                    <a:p>
+                      <a:pPr>
+                        <a:buNone/>
+                      </a:pPr>
+                      <a:r>
+                        <a:rPr lang="en-US">
+                          <a:effectLst/>
+                        </a:rPr>
+                        <a:t>Flask Web Application</a:t>
+                      </a:r>
+                    </a:p>
+                  </a:txBody>
+                  <a:tcPr marL="82550" marR="82550" marT="38100" marB="38100" anchor="ctr"/>
+                </a:tc>
+                <a:tc>
+                  <a:txBody>
+                    <a:bodyPr/>
+                    <a:lstStyle/>
+                    <a:p>
+                      <a:pPr>
+                        <a:buNone/>
+                      </a:pPr>
+                      <a:r>
+                        <a:rPr lang="en-US" dirty="0">
+                          <a:effectLst/>
+                        </a:rPr>
+                        <a:t>Full-stack app with trained classifier inference</a:t>
+                      </a:r>
+                    </a:p>
+                  </a:txBody>
+                  <a:tcPr marL="82550" marR="82550" marT="38100" marB="38100" anchor="ctr"/>
+                </a:tc>
+                <a:extLst>
+                  <a:ext uri="{0D108BD9-81ED-4DB2-BD59-A6C34878D82A}">
+                    <a16:rowId xmlns:a16="http://schemas.microsoft.com/office/drawing/2014/main" val="956651934"/>
+                  </a:ext>
+                </a:extLst>
+              </a:tr>
+            </a:tbl>
+          </a:graphicData>
+        </a:graphic>
+      </p:graphicFrame>
+      <p:sp>
+        <p:nvSpPr>
+          <p:cNvPr id="8" name="TextBox 7">
+            <a:extLst>
+              <a:ext uri="{FF2B5EF4-FFF2-40B4-BE49-F238E27FC236}">
+                <a16:creationId xmlns:a16="http://schemas.microsoft.com/office/drawing/2014/main" id="{1D65DD69-8D6C-B549-A78C-C30C83CE55C0}"/>
+              </a:ext>
+            </a:extLst>
+          </p:cNvPr>
+          <p:cNvSpPr txBox="1"/>
+          <p:nvPr/>
+        </p:nvSpPr>
+        <p:spPr>
+          <a:xfrm>
+            <a:off x="729343" y="1924009"/>
+            <a:ext cx="9993086" cy="646331"/>
+          </a:xfrm>
+          <a:prstGeom prst="rect">
+            <a:avLst/>
+          </a:prstGeom>
+          <a:noFill/>
+        </p:spPr>
+        <p:txBody>
+          <a:bodyPr wrap="square" rtlCol="0">
+            <a:spAutoFit/>
+          </a:bodyPr>
+          <a:lstStyle/>
+          <a:p>
+            <a:r>
+              <a:rPr lang="en-US" dirty="0"/>
+              <a:t>News analysis platform demonstrating advanced NLP techniques including topic modeling, language model integration, multilingual analysis, and conversational AI</a:t>
+            </a:r>
+          </a:p>
+        </p:txBody>
+      </p:sp>
+      <p:sp>
+        <p:nvSpPr>
+          <p:cNvPr id="9" name="TextBox 8">
+            <a:extLst>
+              <a:ext uri="{FF2B5EF4-FFF2-40B4-BE49-F238E27FC236}">
+                <a16:creationId xmlns:a16="http://schemas.microsoft.com/office/drawing/2014/main" id="{AA57B5C8-1CA2-8473-BAFE-3478B5EEC896}"/>
+              </a:ext>
+            </a:extLst>
+          </p:cNvPr>
+          <p:cNvSpPr txBox="1"/>
+          <p:nvPr/>
+        </p:nvSpPr>
+        <p:spPr>
+          <a:xfrm>
+            <a:off x="968829" y="6368143"/>
+            <a:ext cx="2057400" cy="523220"/>
+          </a:xfrm>
+          <a:prstGeom prst="rect">
+            <a:avLst/>
+          </a:prstGeom>
+          <a:noFill/>
+        </p:spPr>
+        <p:txBody>
+          <a:bodyPr wrap="square" rtlCol="0">
+            <a:spAutoFit/>
+          </a:bodyPr>
+          <a:lstStyle/>
+          <a:p>
+            <a:r>
+              <a:rPr lang="en-US" sz="2800" dirty="0" err="1">
+                <a:solidFill>
+                  <a:srgbClr val="00B0F0"/>
+                </a:solidFill>
+                <a:hlinkClick r:id="rId3">
+                  <a:extLst>
+                    <a:ext uri="{A12FA001-AC4F-418D-AE19-62706E023703}">
+                      <ahyp:hlinkClr xmlns:ahyp="http://schemas.microsoft.com/office/drawing/2018/hyperlinkcolor" val="tx"/>
+                    </a:ext>
+                  </a:extLst>
+                </a:hlinkClick>
+              </a:rPr>
+              <a:t>Github</a:t>
+            </a:r>
+            <a:endParaRPr lang="en-US" dirty="0">
+              <a:solidFill>
+                <a:srgbClr val="00B0F0"/>
+              </a:solidFill>
+            </a:endParaRPr>
+          </a:p>
+        </p:txBody>
+      </p:sp>
+    </p:spTree>
+    <p:extLst>
+      <p:ext uri="{BB962C8B-B14F-4D97-AF65-F5344CB8AC3E}">
+        <p14:creationId xmlns:p14="http://schemas.microsoft.com/office/powerpoint/2010/main" val="566428930"/>
+      </p:ext>
+    </p:extLst>
+  </p:cSld>
+  <p:clrMapOvr>
+    <a:masterClrMapping/>
+  </p:clrMapOvr>
+</p:sld>
+</file>
+
+<file path=ppt/slides/slide6.xml><?xml version="1.0" encoding="utf-8"?>
+<p:sld xmlns:a="http://schemas.openxmlformats.org/drawingml/2006/main" xmlns:r="http://schemas.openxmlformats.org/officeDocument/2006/relationships" xmlns:p="http://schemas.openxmlformats.org/presentationml/2006/main">
+  <p:cSld>
+    <p:spTree>
+      <p:nvGrpSpPr>
+        <p:cNvPr id="1" name="">
+          <a:extLst>
+            <a:ext uri="{FF2B5EF4-FFF2-40B4-BE49-F238E27FC236}">
+              <a16:creationId xmlns:a16="http://schemas.microsoft.com/office/drawing/2014/main" id="{3DE22851-AD69-471D-EF02-F708B15F3381}"/>
+            </a:ext>
+          </a:extLst>
+        </p:cNvPr>
+        <p:cNvGrpSpPr/>
+        <p:nvPr/>
+      </p:nvGrpSpPr>
+      <p:grpSpPr>
+        <a:xfrm>
+          <a:off x="0" y="0"/>
+          <a:ext cx="0" cy="0"/>
+          <a:chOff x="0" y="0"/>
+          <a:chExt cx="0" cy="0"/>
+        </a:xfrm>
+      </p:grpSpPr>
+      <p:sp>
+        <p:nvSpPr>
+          <p:cNvPr id="6" name="Title 1">
+            <a:extLst>
+              <a:ext uri="{FF2B5EF4-FFF2-40B4-BE49-F238E27FC236}">
+                <a16:creationId xmlns:a16="http://schemas.microsoft.com/office/drawing/2014/main" id="{DBC69F9D-D059-234D-5F85-14C8320ED7AE}"/>
+              </a:ext>
+            </a:extLst>
+          </p:cNvPr>
+          <p:cNvSpPr>
+            <a:spLocks noGrp="1"/>
+          </p:cNvSpPr>
+          <p:nvPr>
+            <p:ph type="title"/>
+          </p:nvPr>
+        </p:nvSpPr>
+        <p:spPr>
+          <a:xfrm>
+            <a:off x="570306" y="934791"/>
+            <a:ext cx="11029616" cy="1013800"/>
+          </a:xfrm>
+        </p:spPr>
+        <p:txBody>
+          <a:bodyPr>
+            <a:normAutofit fontScale="90000"/>
+          </a:bodyPr>
+          <a:lstStyle/>
+          <a:p>
+            <a:r>
+              <a:rPr lang="en-US" dirty="0"/>
+              <a:t>Computer vision: </a:t>
+            </a:r>
+            <a:r>
+              <a:rPr lang="en-US" b="1" dirty="0"/>
+              <a:t>Food Classification — Nutrition Tracker CV System</a:t>
+            </a:r>
+            <a:br>
+              <a:rPr lang="en-US" b="1" dirty="0"/>
+            </a:br>
+            <a:endParaRPr lang="en-US" dirty="0"/>
+          </a:p>
+        </p:txBody>
+      </p:sp>
+      <p:graphicFrame>
+        <p:nvGraphicFramePr>
+          <p:cNvPr id="2" name="Content Placeholder 1">
+            <a:extLst>
+              <a:ext uri="{FF2B5EF4-FFF2-40B4-BE49-F238E27FC236}">
+                <a16:creationId xmlns:a16="http://schemas.microsoft.com/office/drawing/2014/main" id="{128A2717-E6CE-617D-8384-BDE7F2E6604E}"/>
+              </a:ext>
+            </a:extLst>
+          </p:cNvPr>
+          <p:cNvGraphicFramePr>
+            <a:graphicFrameLocks noGrp="1"/>
+          </p:cNvGraphicFramePr>
+          <p:nvPr>
+            <p:ph idx="1"/>
+            <p:extLst>
+              <p:ext uri="{D42A27DB-BD31-4B8C-83A1-F6EECF244321}">
+                <p14:modId xmlns:p14="http://schemas.microsoft.com/office/powerpoint/2010/main" val="587135797"/>
+              </p:ext>
+            </p:extLst>
+          </p:nvPr>
+        </p:nvGraphicFramePr>
+        <p:xfrm>
+          <a:off x="569972" y="3117397"/>
+          <a:ext cx="11029950" cy="2362200"/>
+        </p:xfrm>
+        <a:graphic>
+          <a:graphicData uri="http://schemas.openxmlformats.org/drawingml/2006/table">
+            <a:tbl>
+              <a:tblPr firstRow="1" bandRow="1">
+                <a:tableStyleId>{5C22544A-7EE6-4342-B048-85BDC9FD1C3A}</a:tableStyleId>
+              </a:tblPr>
+              <a:tblGrid>
+                <a:gridCol w="5514975">
+                  <a:extLst>
+                    <a:ext uri="{9D8B030D-6E8A-4147-A177-3AD203B41FA5}">
+                      <a16:colId xmlns:a16="http://schemas.microsoft.com/office/drawing/2014/main" val="2181090975"/>
+                    </a:ext>
+                  </a:extLst>
+                </a:gridCol>
+                <a:gridCol w="5514975">
+                  <a:extLst>
+                    <a:ext uri="{9D8B030D-6E8A-4147-A177-3AD203B41FA5}">
+                      <a16:colId xmlns:a16="http://schemas.microsoft.com/office/drawing/2014/main" val="3454468522"/>
+                    </a:ext>
+                  </a:extLst>
+                </a:gridCol>
+              </a:tblGrid>
+              <a:tr h="370840">
+                <a:tc>
+                  <a:txBody>
+                    <a:bodyPr/>
+                    <a:lstStyle/>
+                    <a:p>
+                      <a:pPr>
+                        <a:buNone/>
+                      </a:pPr>
+                      <a:r>
+                        <a:rPr lang="en-US" b="1">
+                          <a:effectLst/>
+                        </a:rPr>
+                        <a:t>Detail</a:t>
+                      </a:r>
+                    </a:p>
+                  </a:txBody>
+                  <a:tcPr marL="82550" marR="82550" marT="38100" marB="38100" anchor="ctr"/>
+                </a:tc>
+                <a:tc>
+                  <a:txBody>
+                    <a:bodyPr/>
+                    <a:lstStyle/>
+                    <a:p>
+                      <a:pPr>
+                        <a:buNone/>
+                      </a:pPr>
+                      <a:r>
+                        <a:rPr lang="en-US" b="1">
+                          <a:effectLst/>
+                        </a:rPr>
+                        <a:t>Value</a:t>
+                      </a:r>
+                    </a:p>
+                  </a:txBody>
+                  <a:tcPr marL="82550" marR="82550" marT="38100" marB="38100" anchor="ctr"/>
+                </a:tc>
+                <a:extLst>
+                  <a:ext uri="{0D108BD9-81ED-4DB2-BD59-A6C34878D82A}">
+                    <a16:rowId xmlns:a16="http://schemas.microsoft.com/office/drawing/2014/main" val="1959077712"/>
+                  </a:ext>
+                </a:extLst>
+              </a:tr>
+              <a:tr h="370840">
+                <a:tc>
+                  <a:txBody>
+                    <a:bodyPr/>
+                    <a:lstStyle/>
+                    <a:p>
+                      <a:pPr>
+                        <a:buNone/>
+                      </a:pPr>
+                      <a:r>
+                        <a:rPr lang="en-US">
+                          <a:effectLst/>
+                        </a:rPr>
+                        <a:t>Model</a:t>
+                      </a:r>
+                    </a:p>
+                  </a:txBody>
+                  <a:tcPr marL="82550" marR="82550" marT="38100" marB="38100" anchor="ctr"/>
+                </a:tc>
+                <a:tc>
+                  <a:txBody>
+                    <a:bodyPr/>
+                    <a:lstStyle/>
+                    <a:p>
+                      <a:pPr>
+                        <a:buNone/>
+                      </a:pPr>
+                      <a:r>
+                        <a:rPr lang="en-US">
+                          <a:effectLst/>
+                        </a:rPr>
+                        <a:t>EfficientNet-B0 (ImageNet → Food-101)</a:t>
+                      </a:r>
+                    </a:p>
+                  </a:txBody>
+                  <a:tcPr marL="82550" marR="82550" marT="38100" marB="38100" anchor="ctr"/>
+                </a:tc>
+                <a:extLst>
+                  <a:ext uri="{0D108BD9-81ED-4DB2-BD59-A6C34878D82A}">
+                    <a16:rowId xmlns:a16="http://schemas.microsoft.com/office/drawing/2014/main" val="3079342903"/>
+                  </a:ext>
+                </a:extLst>
+              </a:tr>
+              <a:tr h="370840">
+                <a:tc>
+                  <a:txBody>
+                    <a:bodyPr/>
+                    <a:lstStyle/>
+                    <a:p>
+                      <a:pPr>
+                        <a:buNone/>
+                      </a:pPr>
+                      <a:r>
+                        <a:rPr lang="en-US">
+                          <a:effectLst/>
+                        </a:rPr>
+                        <a:t>Dataset</a:t>
+                      </a:r>
+                    </a:p>
+                  </a:txBody>
+                  <a:tcPr marL="82550" marR="82550" marT="38100" marB="38100" anchor="ctr"/>
+                </a:tc>
+                <a:tc>
+                  <a:txBody>
+                    <a:bodyPr/>
+                    <a:lstStyle/>
+                    <a:p>
+                      <a:pPr>
+                        <a:buNone/>
+                      </a:pPr>
+                      <a:r>
+                        <a:rPr lang="en-US">
+                          <a:effectLst/>
+                        </a:rPr>
+                        <a:t>torchvision Food-101 · 101 categories · 75,750 train / 25,250 val</a:t>
+                      </a:r>
+                    </a:p>
+                  </a:txBody>
+                  <a:tcPr marL="82550" marR="82550" marT="38100" marB="38100" anchor="ctr"/>
+                </a:tc>
+                <a:extLst>
+                  <a:ext uri="{0D108BD9-81ED-4DB2-BD59-A6C34878D82A}">
+                    <a16:rowId xmlns:a16="http://schemas.microsoft.com/office/drawing/2014/main" val="4164144350"/>
+                  </a:ext>
+                </a:extLst>
+              </a:tr>
+              <a:tr h="370840">
+                <a:tc>
+                  <a:txBody>
+                    <a:bodyPr/>
+                    <a:lstStyle/>
+                    <a:p>
+                      <a:pPr>
+                        <a:buNone/>
+                      </a:pPr>
+                      <a:r>
+                        <a:rPr lang="en-US">
+                          <a:effectLst/>
+                        </a:rPr>
+                        <a:t>Framework</a:t>
+                      </a:r>
+                    </a:p>
+                  </a:txBody>
+                  <a:tcPr marL="82550" marR="82550" marT="38100" marB="38100" anchor="ctr"/>
+                </a:tc>
+                <a:tc>
+                  <a:txBody>
+                    <a:bodyPr/>
+                    <a:lstStyle/>
+                    <a:p>
+                      <a:pPr>
+                        <a:buNone/>
+                      </a:pPr>
+                      <a:r>
+                        <a:rPr lang="en-US">
+                          <a:effectLst/>
+                        </a:rPr>
+                        <a:t>PyTorch + torchvision</a:t>
+                      </a:r>
+                    </a:p>
+                  </a:txBody>
+                  <a:tcPr marL="82550" marR="82550" marT="38100" marB="38100" anchor="ctr"/>
+                </a:tc>
+                <a:extLst>
+                  <a:ext uri="{0D108BD9-81ED-4DB2-BD59-A6C34878D82A}">
+                    <a16:rowId xmlns:a16="http://schemas.microsoft.com/office/drawing/2014/main" val="2515347722"/>
+                  </a:ext>
+                </a:extLst>
+              </a:tr>
+              <a:tr h="370840">
+                <a:tc>
+                  <a:txBody>
+                    <a:bodyPr/>
+                    <a:lstStyle/>
+                    <a:p>
+                      <a:pPr>
+                        <a:buNone/>
+                      </a:pPr>
+                      <a:r>
+                        <a:rPr lang="en-US">
+                          <a:effectLst/>
+                        </a:rPr>
+                        <a:t>Key techniques</a:t>
+                      </a:r>
+                    </a:p>
+                  </a:txBody>
+                  <a:tcPr marL="82550" marR="82550" marT="38100" marB="38100" anchor="ctr"/>
+                </a:tc>
+                <a:tc>
+                  <a:txBody>
+                    <a:bodyPr/>
+                    <a:lstStyle/>
+                    <a:p>
+                      <a:pPr>
+                        <a:buNone/>
+                      </a:pPr>
+                      <a:r>
+                        <a:rPr lang="en-US" dirty="0">
+                          <a:effectLst/>
+                        </a:rPr>
+                        <a:t>Two-phase fine-tuning, data augmentation, label smoothing, </a:t>
+                      </a:r>
+                      <a:r>
+                        <a:rPr lang="en-US" dirty="0" err="1">
+                          <a:effectLst/>
+                        </a:rPr>
+                        <a:t>CosineAnnealingLR</a:t>
+                      </a:r>
+                      <a:endParaRPr lang="en-US" dirty="0">
+                        <a:effectLst/>
+                      </a:endParaRPr>
+                    </a:p>
+                  </a:txBody>
+                  <a:tcPr marL="82550" marR="82550" marT="38100" marB="38100" anchor="ctr"/>
+                </a:tc>
+                <a:extLst>
+                  <a:ext uri="{0D108BD9-81ED-4DB2-BD59-A6C34878D82A}">
+                    <a16:rowId xmlns:a16="http://schemas.microsoft.com/office/drawing/2014/main" val="1297956392"/>
+                  </a:ext>
+                </a:extLst>
+              </a:tr>
+            </a:tbl>
+          </a:graphicData>
+        </a:graphic>
+      </p:graphicFrame>
+      <p:sp>
+        <p:nvSpPr>
+          <p:cNvPr id="3" name="TextBox 2">
+            <a:extLst>
+              <a:ext uri="{FF2B5EF4-FFF2-40B4-BE49-F238E27FC236}">
+                <a16:creationId xmlns:a16="http://schemas.microsoft.com/office/drawing/2014/main" id="{0D0BC02F-6B54-1AB0-124F-C9D99551CDBD}"/>
+              </a:ext>
+            </a:extLst>
+          </p:cNvPr>
+          <p:cNvSpPr txBox="1"/>
+          <p:nvPr/>
+        </p:nvSpPr>
+        <p:spPr>
+          <a:xfrm>
+            <a:off x="674915" y="5624962"/>
+            <a:ext cx="2024743" cy="769441"/>
+          </a:xfrm>
+          <a:prstGeom prst="rect">
+            <a:avLst/>
+          </a:prstGeom>
+          <a:noFill/>
+        </p:spPr>
+        <p:txBody>
+          <a:bodyPr wrap="square" rtlCol="0">
+            <a:spAutoFit/>
+          </a:bodyPr>
+          <a:lstStyle/>
+          <a:p>
+            <a:r>
+              <a:rPr lang="en-US" sz="4400" dirty="0" err="1">
+                <a:solidFill>
+                  <a:srgbClr val="00B0F0"/>
+                </a:solidFill>
+                <a:hlinkClick r:id="rId2">
+                  <a:extLst>
+                    <a:ext uri="{A12FA001-AC4F-418D-AE19-62706E023703}">
+                      <ahyp:hlinkClr xmlns:ahyp="http://schemas.microsoft.com/office/drawing/2018/hyperlinkcolor" val="tx"/>
+                    </a:ext>
+                  </a:extLst>
+                </a:hlinkClick>
+              </a:rPr>
+              <a:t>Github</a:t>
+            </a:r>
+            <a:endParaRPr lang="en-US" dirty="0">
+              <a:solidFill>
+                <a:srgbClr val="00B0F0"/>
+              </a:solidFill>
+            </a:endParaRPr>
+          </a:p>
+        </p:txBody>
+      </p:sp>
+      <p:sp>
+        <p:nvSpPr>
+          <p:cNvPr id="4" name="TextBox 3">
+            <a:extLst>
+              <a:ext uri="{FF2B5EF4-FFF2-40B4-BE49-F238E27FC236}">
+                <a16:creationId xmlns:a16="http://schemas.microsoft.com/office/drawing/2014/main" id="{AC1BA9B3-347A-5BB1-AC00-4AC30AD575A1}"/>
+              </a:ext>
+            </a:extLst>
+          </p:cNvPr>
+          <p:cNvSpPr txBox="1"/>
+          <p:nvPr/>
+        </p:nvSpPr>
+        <p:spPr>
+          <a:xfrm>
+            <a:off x="468085" y="1986047"/>
+            <a:ext cx="11029616" cy="923330"/>
+          </a:xfrm>
+          <a:prstGeom prst="rect">
+            <a:avLst/>
+          </a:prstGeom>
+          <a:noFill/>
+        </p:spPr>
+        <p:txBody>
+          <a:bodyPr wrap="square" rtlCol="0">
+            <a:spAutoFit/>
+          </a:bodyPr>
+          <a:lstStyle/>
+          <a:p>
+            <a:r>
+              <a:rPr lang="en-US" dirty="0"/>
+              <a:t> Food classifier built with EfficientNet-B0, fine-tuned on Food-101 (101 classes, 75,750 training images). The system identifies a food item from a single image and returns the dish name plus estimated nutritional information (calories, protein, carbs, fat).</a:t>
+            </a:r>
+          </a:p>
+        </p:txBody>
+      </p:sp>
+    </p:spTree>
+    <p:extLst>
+      <p:ext uri="{BB962C8B-B14F-4D97-AF65-F5344CB8AC3E}">
+        <p14:creationId xmlns:p14="http://schemas.microsoft.com/office/powerpoint/2010/main" val="2329947176"/>
+      </p:ext>
+    </p:extLst>
+  </p:cSld>
+  <p:clrMapOvr>
+    <a:masterClrMapping/>
+  </p:clrMapOvr>
+</p:sld>
+</file>
+
+<file path=ppt/slides/slide7.xml><?xml version="1.0" encoding="utf-8"?>
 <p:sld xmlns:a="http://schemas.openxmlformats.org/drawingml/2006/main" xmlns:r="http://schemas.openxmlformats.org/officeDocument/2006/relationships" xmlns:p="http://schemas.openxmlformats.org/presentationml/2006/main">
   <p:cSld>
     <p:bg>
@@ -9718,7 +10523,7 @@
 </p:sld>
 </file>
 
-<file path=ppt/slides/slide5.xml><?xml version="1.0" encoding="utf-8"?>
+<file path=ppt/slides/slide8.xml><?xml version="1.0" encoding="utf-8"?>
 <p:sld xmlns:a="http://schemas.openxmlformats.org/drawingml/2006/main" xmlns:r="http://schemas.openxmlformats.org/officeDocument/2006/relationships" xmlns:p="http://schemas.openxmlformats.org/presentationml/2006/main">
   <p:cSld>
     <p:spTree>
@@ -11123,6 +11928,35 @@
 </file>
 
 <file path=customXml/item1.xml><?xml version="1.0" encoding="utf-8"?>
+<p:properties xmlns:p="http://schemas.microsoft.com/office/2006/metadata/properties" xmlns:xsi="http://www.w3.org/2001/XMLSchema-instance" xmlns:pc="http://schemas.microsoft.com/office/infopath/2007/PartnerControls">
+  <documentManagement>
+    <_ip_UnifiedCompliancePolicyUIAction xmlns="http://schemas.microsoft.com/sharepoint/v3" xsi:nil="true"/>
+    <Image xmlns="71af3243-3dd4-4a8d-8c0d-dd76da1f02a5">
+      <Url xsi:nil="true"/>
+      <Description xsi:nil="true"/>
+    </Image>
+    <Status xmlns="71af3243-3dd4-4a8d-8c0d-dd76da1f02a5">Not started</Status>
+    <Background xmlns="71af3243-3dd4-4a8d-8c0d-dd76da1f02a5">false</Background>
+    <_ip_UnifiedCompliancePolicyProperties xmlns="http://schemas.microsoft.com/sharepoint/v3" xsi:nil="true"/>
+    <ImageTagsTaxHTField xmlns="71af3243-3dd4-4a8d-8c0d-dd76da1f02a5">
+      <Terms xmlns="http://schemas.microsoft.com/office/infopath/2007/PartnerControls"/>
+    </ImageTagsTaxHTField>
+    <TaxCatchAll xmlns="230e9df3-be65-4c73-a93b-d1236ebd677e" xsi:nil="true"/>
+    <MediaServiceKeyPoints xmlns="71af3243-3dd4-4a8d-8c0d-dd76da1f02a5" xsi:nil="true"/>
+  </documentManagement>
+</p:properties>
+</file>
+
+<file path=customXml/item2.xml><?xml version="1.0" encoding="utf-8"?>
+<?mso-contentType ?>
+<FormTemplates xmlns="http://schemas.microsoft.com/sharepoint/v3/contenttype/forms">
+  <Display>DocumentLibraryForm</Display>
+  <Edit>DocumentLibraryForm</Edit>
+  <New>DocumentLibraryForm</New>
+</FormTemplates>
+</file>
+
+<file path=customXml/item3.xml><?xml version="1.0" encoding="utf-8"?>
 <ct:contentTypeSchema xmlns:ct="http://schemas.microsoft.com/office/2006/metadata/contentType" xmlns:ma="http://schemas.microsoft.com/office/2006/metadata/properties/metaAttributes" ct:_="" ma:_="" ma:contentTypeName="Document" ma:contentTypeID="0x01010079F111ED35F8CC479449609E8A0923A6" ma:contentTypeVersion="27" ma:contentTypeDescription="Create a new document." ma:contentTypeScope="" ma:versionID="c6f9a84f66a9c8b9a21755b9ffafb945">
   <xsd:schema xmlns:xsd="http://www.w3.org/2001/XMLSchema" xmlns:xs="http://www.w3.org/2001/XMLSchema" xmlns:p="http://schemas.microsoft.com/office/2006/metadata/properties" xmlns:ns1="http://schemas.microsoft.com/sharepoint/v3" xmlns:ns2="71af3243-3dd4-4a8d-8c0d-dd76da1f02a5" xmlns:ns3="16c05727-aa75-4e4a-9b5f-8a80a1165891" xmlns:ns4="230e9df3-be65-4c73-a93b-d1236ebd677e" targetNamespace="http://schemas.microsoft.com/office/2006/metadata/properties" ma:root="true" ma:fieldsID="27df39e3e7036dff54f89ddd5805ce72" ns1:_="" ns2:_="" ns3:_="" ns4:_="">
     <xsd:import namespace="http://schemas.microsoft.com/sharepoint/v3"/>
@@ -11428,36 +12262,27 @@
 </ct:contentTypeSchema>
 </file>
 
-<file path=customXml/item2.xml><?xml version="1.0" encoding="utf-8"?>
-<?mso-contentType ?>
-<FormTemplates xmlns="http://schemas.microsoft.com/sharepoint/v3/contenttype/forms">
-  <Display>DocumentLibraryForm</Display>
-  <Edit>DocumentLibraryForm</Edit>
-  <New>DocumentLibraryForm</New>
-</FormTemplates>
+<file path=customXml/itemProps1.xml><?xml version="1.0" encoding="utf-8"?>
+<ds:datastoreItem xmlns:ds="http://schemas.openxmlformats.org/officeDocument/2006/customXml" ds:itemID="{3791575F-4C21-47C4-8D13-EB9BE66B536F}">
+  <ds:schemaRefs>
+    <ds:schemaRef ds:uri="http://schemas.microsoft.com/office/2006/metadata/properties"/>
+    <ds:schemaRef ds:uri="http://schemas.microsoft.com/office/infopath/2007/PartnerControls"/>
+    <ds:schemaRef ds:uri="http://schemas.microsoft.com/sharepoint/v3"/>
+    <ds:schemaRef ds:uri="71af3243-3dd4-4a8d-8c0d-dd76da1f02a5"/>
+    <ds:schemaRef ds:uri="230e9df3-be65-4c73-a93b-d1236ebd677e"/>
+  </ds:schemaRefs>
+</ds:datastoreItem>
 </file>
 
-<file path=customXml/item3.xml><?xml version="1.0" encoding="utf-8"?>
-<p:properties xmlns:p="http://schemas.microsoft.com/office/2006/metadata/properties" xmlns:xsi="http://www.w3.org/2001/XMLSchema-instance" xmlns:pc="http://schemas.microsoft.com/office/infopath/2007/PartnerControls">
-  <documentManagement>
-    <_ip_UnifiedCompliancePolicyUIAction xmlns="http://schemas.microsoft.com/sharepoint/v3" xsi:nil="true"/>
-    <Image xmlns="71af3243-3dd4-4a8d-8c0d-dd76da1f02a5">
-      <Url xsi:nil="true"/>
-      <Description xsi:nil="true"/>
-    </Image>
-    <Status xmlns="71af3243-3dd4-4a8d-8c0d-dd76da1f02a5">Not started</Status>
-    <Background xmlns="71af3243-3dd4-4a8d-8c0d-dd76da1f02a5">false</Background>
-    <_ip_UnifiedCompliancePolicyProperties xmlns="http://schemas.microsoft.com/sharepoint/v3" xsi:nil="true"/>
-    <ImageTagsTaxHTField xmlns="71af3243-3dd4-4a8d-8c0d-dd76da1f02a5">
-      <Terms xmlns="http://schemas.microsoft.com/office/infopath/2007/PartnerControls"/>
-    </ImageTagsTaxHTField>
-    <TaxCatchAll xmlns="230e9df3-be65-4c73-a93b-d1236ebd677e" xsi:nil="true"/>
-    <MediaServiceKeyPoints xmlns="71af3243-3dd4-4a8d-8c0d-dd76da1f02a5" xsi:nil="true"/>
-  </documentManagement>
-</p:properties>
+<file path=customXml/itemProps2.xml><?xml version="1.0" encoding="utf-8"?>
+<ds:datastoreItem xmlns:ds="http://schemas.openxmlformats.org/officeDocument/2006/customXml" ds:itemID="{342D3C2F-55A5-48C0-9D5A-95C7FF0389D0}">
+  <ds:schemaRefs>
+    <ds:schemaRef ds:uri="http://schemas.microsoft.com/sharepoint/v3/contenttype/forms"/>
+  </ds:schemaRefs>
+</ds:datastoreItem>
 </file>
 
-<file path=customXml/itemProps1.xml><?xml version="1.0" encoding="utf-8"?>
+<file path=customXml/itemProps3.xml><?xml version="1.0" encoding="utf-8"?>
 <ds:datastoreItem xmlns:ds="http://schemas.openxmlformats.org/officeDocument/2006/customXml" ds:itemID="{792209EB-3212-4116-B574-D1F56C7C4922}">
   <ds:schemaRefs>
     <ds:schemaRef ds:uri="http://schemas.microsoft.com/office/2006/metadata/contentType"/>
@@ -11476,24 +12301,4 @@
     <ds:schemaRef ds:uri="http://schemas.microsoft.com/internal/obd"/>
   </ds:schemaRefs>
 </ds:datastoreItem>
-</file>
-
-<file path=customXml/itemProps2.xml><?xml version="1.0" encoding="utf-8"?>
-<ds:datastoreItem xmlns:ds="http://schemas.openxmlformats.org/officeDocument/2006/customXml" ds:itemID="{342D3C2F-55A5-48C0-9D5A-95C7FF0389D0}">
-  <ds:schemaRefs>
-    <ds:schemaRef ds:uri="http://schemas.microsoft.com/sharepoint/v3/contenttype/forms"/>
-  </ds:schemaRefs>
-</ds:datastoreItem>
-</file>
-
-<file path=customXml/itemProps3.xml><?xml version="1.0" encoding="utf-8"?>
-<ds:datastoreItem xmlns:ds="http://schemas.openxmlformats.org/officeDocument/2006/customXml" ds:itemID="{3791575F-4C21-47C4-8D13-EB9BE66B536F}">
-  <ds:schemaRefs>
-    <ds:schemaRef ds:uri="http://schemas.microsoft.com/office/2006/metadata/properties"/>
-    <ds:schemaRef ds:uri="http://schemas.microsoft.com/office/infopath/2007/PartnerControls"/>
-    <ds:schemaRef ds:uri="http://schemas.microsoft.com/sharepoint/v3"/>
-    <ds:schemaRef ds:uri="71af3243-3dd4-4a8d-8c0d-dd76da1f02a5"/>
-    <ds:schemaRef ds:uri="230e9df3-be65-4c73-a93b-d1236ebd677e"/>
-  </ds:schemaRefs>
-</ds:datastoreItem>
 </file>